--- a/submission/Kendali_FinTechathon2026_Deck.pptx
+++ b/submission/Kendali_FinTechathon2026_Deck.pptx
@@ -820,7 +820,7 @@
           <a:p>
             <a:r>
               <a:rPr lang="en-US" dirty="0"/>
-              <a:t>Good afternoon. We are team [TEAM NAME] from Institut Teknologi Bandung, Indonesia. This is Kendali, which means 'control' in Indonesian. Kendali is an AI agent that acts as the finance clerk of a small business. It reads invoices, pays suppliers on-chain and manages the treasury on its own. And it is built so that it cannot be tricked into losing the money it controls. Our whole design fits in one sentence: the LLM proposes, the policy decides, the contract enforces.</a:t>
+              <a:t>Good afternoon. We are team Kendali from Institut Teknologi Bandung, Indonesia. This is Kendali, which means 'control' in Indonesian. Kendali is an AI agent that acts as the finance clerk of a small business. It reads invoices, pays suppliers on-chain and manages the treasury on its own. And it is built so that it cannot be tricked into losing the money it controls. Our whole design fits in one sentence: the LLM proposes, the policy decides, the contract enforces.</a:t>
             </a:r>
             <a:endParaRPr lang="en-US" dirty="0"/>
           </a:p>
@@ -2677,7 +2677,7 @@
                   <a:srgbClr val="CBD5E1"/>
                 </a:solidFill>
               </a:rPr>
-              <a:t>Team [TEAM NAME]  ·  Institut Teknologi Bandung, Indonesia</a:t>
+              <a:t>Team Kendali  ·  Institut Teknologi Bandung, Indonesia</a:t>
             </a:r>
             <a:endParaRPr lang="en-US" sz="1500" dirty="0"/>
           </a:p>
@@ -2709,6 +2709,10 @@
             <a:prstDash val="solid"/>
           </a:ln>
         </p:spPr>
+        <p:txBody>
+          <a:bodyPr/>
+          <a:p/>
+        </p:txBody>
       </p:sp>
       <p:sp>
         <p:nvSpPr>
@@ -2786,6 +2790,10 @@
             <a:prstDash val="solid"/>
           </a:ln>
         </p:spPr>
+        <p:txBody>
+          <a:bodyPr/>
+          <a:p/>
+        </p:txBody>
       </p:sp>
       <p:sp>
         <p:nvSpPr>
@@ -2863,6 +2871,10 @@
             <a:prstDash val="solid"/>
           </a:ln>
         </p:spPr>
+        <p:txBody>
+          <a:bodyPr/>
+          <a:p/>
+        </p:txBody>
       </p:sp>
       <p:sp>
         <p:nvSpPr>
@@ -4311,6 +4323,10 @@
             <a:prstDash val="solid"/>
           </a:ln>
         </p:spPr>
+        <p:txBody>
+          <a:bodyPr/>
+          <a:p/>
+        </p:txBody>
       </p:sp>
       <p:sp>
         <p:nvSpPr>
@@ -4386,6 +4402,10 @@
             <a:prstDash val="solid"/>
           </a:ln>
         </p:spPr>
+        <p:txBody>
+          <a:bodyPr/>
+          <a:p/>
+        </p:txBody>
       </p:sp>
       <p:sp>
         <p:nvSpPr>
@@ -4413,6 +4433,10 @@
             <a:prstDash val="solid"/>
           </a:ln>
         </p:spPr>
+        <p:txBody>
+          <a:bodyPr/>
+          <a:p/>
+        </p:txBody>
       </p:sp>
       <p:sp>
         <p:nvSpPr>
@@ -4488,6 +4512,10 @@
             <a:prstDash val="solid"/>
           </a:ln>
         </p:spPr>
+        <p:txBody>
+          <a:bodyPr/>
+          <a:p/>
+        </p:txBody>
       </p:sp>
       <p:sp>
         <p:nvSpPr>
@@ -4515,6 +4543,10 @@
             <a:prstDash val="solid"/>
           </a:ln>
         </p:spPr>
+        <p:txBody>
+          <a:bodyPr/>
+          <a:p/>
+        </p:txBody>
       </p:sp>
       <p:sp>
         <p:nvSpPr>
@@ -4590,6 +4622,10 @@
             <a:prstDash val="solid"/>
           </a:ln>
         </p:spPr>
+        <p:txBody>
+          <a:bodyPr/>
+          <a:p/>
+        </p:txBody>
       </p:sp>
       <p:sp>
         <p:nvSpPr>
@@ -4617,6 +4653,10 @@
             <a:prstDash val="solid"/>
           </a:ln>
         </p:spPr>
+        <p:txBody>
+          <a:bodyPr/>
+          <a:p/>
+        </p:txBody>
       </p:sp>
       <p:sp>
         <p:nvSpPr>
@@ -4809,6 +4849,10 @@
             </a:outerShdw>
           </a:effectLst>
         </p:spPr>
+        <p:txBody>
+          <a:bodyPr/>
+          <a:p/>
+        </p:txBody>
       </p:sp>
       <p:sp>
         <p:nvSpPr>
@@ -4836,6 +4880,10 @@
             <a:prstDash val="solid"/>
           </a:ln>
         </p:spPr>
+        <p:txBody>
+          <a:bodyPr/>
+          <a:p/>
+        </p:txBody>
       </p:sp>
       <p:sp>
         <p:nvSpPr>
@@ -4982,6 +5030,10 @@
             </a:outerShdw>
           </a:effectLst>
         </p:spPr>
+        <p:txBody>
+          <a:bodyPr/>
+          <a:p/>
+        </p:txBody>
       </p:sp>
       <p:sp>
         <p:nvSpPr>
@@ -5009,6 +5061,10 @@
             <a:prstDash val="solid"/>
           </a:ln>
         </p:spPr>
+        <p:txBody>
+          <a:bodyPr/>
+          <a:p/>
+        </p:txBody>
       </p:sp>
       <p:sp>
         <p:nvSpPr>
@@ -5155,6 +5211,10 @@
             </a:outerShdw>
           </a:effectLst>
         </p:spPr>
+        <p:txBody>
+          <a:bodyPr/>
+          <a:p/>
+        </p:txBody>
       </p:sp>
       <p:sp>
         <p:nvSpPr>
@@ -5182,6 +5242,10 @@
             <a:prstDash val="solid"/>
           </a:ln>
         </p:spPr>
+        <p:txBody>
+          <a:bodyPr/>
+          <a:p/>
+        </p:txBody>
       </p:sp>
       <p:sp>
         <p:nvSpPr>
@@ -5328,6 +5392,10 @@
             </a:outerShdw>
           </a:effectLst>
         </p:spPr>
+        <p:txBody>
+          <a:bodyPr/>
+          <a:p/>
+        </p:txBody>
       </p:sp>
       <p:sp>
         <p:nvSpPr>
@@ -5508,6 +5576,10 @@
             <a:prstDash val="solid"/>
           </a:ln>
         </p:spPr>
+        <p:txBody>
+          <a:bodyPr/>
+          <a:p/>
+        </p:txBody>
       </p:sp>
       <p:sp>
         <p:nvSpPr>
@@ -5616,6 +5688,10 @@
             <a:prstDash val="solid"/>
           </a:ln>
         </p:spPr>
+        <p:txBody>
+          <a:bodyPr/>
+          <a:p/>
+        </p:txBody>
       </p:sp>
       <p:sp>
         <p:nvSpPr>
@@ -5724,6 +5800,10 @@
             <a:prstDash val="solid"/>
           </a:ln>
         </p:spPr>
+        <p:txBody>
+          <a:bodyPr/>
+          <a:p/>
+        </p:txBody>
       </p:sp>
       <p:sp>
         <p:nvSpPr>
@@ -5838,7 +5918,7 @@
                   <a:srgbClr val="5EEAD4"/>
                 </a:solidFill>
               </a:rPr>
-              <a:t>Thank you — Team [TEAM NAME] · Institut Teknologi Bandung</a:t>
+              <a:t>Thank you — Team Kendali · Institut Teknologi Bandung</a:t>
             </a:r>
             <a:endParaRPr lang="en-US" sz="1700" dirty="0"/>
           </a:p>
@@ -5874,7 +5954,7 @@
                   <a:srgbClr val="94A3B8"/>
                 </a:solidFill>
               </a:rPr>
-              <a:t>Code, evaluation and evidence: github.com/[team]/kendali</a:t>
+              <a:t>Code, evaluation and evidence: github.com/&lt;github-user&gt;/kendali</a:t>
             </a:r>
             <a:endParaRPr lang="en-US" sz="1400" dirty="0"/>
           </a:p>
@@ -5976,6 +6056,10 @@
             </a:outerShdw>
           </a:effectLst>
         </p:spPr>
+        <p:txBody>
+          <a:bodyPr/>
+          <a:p/>
+        </p:txBody>
       </p:sp>
       <p:sp>
         <p:nvSpPr>
@@ -6154,6 +6238,10 @@
             </a:outerShdw>
           </a:effectLst>
         </p:spPr>
+        <p:txBody>
+          <a:bodyPr/>
+          <a:p/>
+        </p:txBody>
       </p:sp>
       <p:sp>
         <p:nvSpPr>
@@ -6179,6 +6267,10 @@
             <a:prstDash val="solid"/>
           </a:ln>
         </p:spPr>
+        <p:txBody>
+          <a:bodyPr/>
+          <a:p/>
+        </p:txBody>
       </p:sp>
       <p:sp>
         <p:nvSpPr>
@@ -6321,6 +6413,10 @@
             </a:outerShdw>
           </a:effectLst>
         </p:spPr>
+        <p:txBody>
+          <a:bodyPr/>
+          <a:p/>
+        </p:txBody>
       </p:sp>
       <p:sp>
         <p:nvSpPr>
@@ -6346,6 +6442,10 @@
             <a:prstDash val="solid"/>
           </a:ln>
         </p:spPr>
+        <p:txBody>
+          <a:bodyPr/>
+          <a:p/>
+        </p:txBody>
       </p:sp>
       <p:sp>
         <p:nvSpPr>
@@ -6488,6 +6588,10 @@
             </a:outerShdw>
           </a:effectLst>
         </p:spPr>
+        <p:txBody>
+          <a:bodyPr/>
+          <a:p/>
+        </p:txBody>
       </p:sp>
       <p:sp>
         <p:nvSpPr>
@@ -6513,6 +6617,10 @@
             <a:prstDash val="solid"/>
           </a:ln>
         </p:spPr>
+        <p:txBody>
+          <a:bodyPr/>
+          <a:p/>
+        </p:txBody>
       </p:sp>
       <p:sp>
         <p:nvSpPr>
@@ -6895,6 +7003,10 @@
             </a:outerShdw>
           </a:effectLst>
         </p:spPr>
+        <p:txBody>
+          <a:bodyPr/>
+          <a:p/>
+        </p:txBody>
       </p:sp>
       <p:sp>
         <p:nvSpPr>
@@ -6920,6 +7032,10 @@
             <a:prstDash val="solid"/>
           </a:ln>
         </p:spPr>
+        <p:txBody>
+          <a:bodyPr/>
+          <a:p/>
+        </p:txBody>
       </p:sp>
       <p:sp>
         <p:nvSpPr>
@@ -7098,6 +7214,10 @@
             </a:outerShdw>
           </a:effectLst>
         </p:spPr>
+        <p:txBody>
+          <a:bodyPr/>
+          <a:p/>
+        </p:txBody>
       </p:sp>
       <p:sp>
         <p:nvSpPr>
@@ -7123,6 +7243,10 @@
             <a:prstDash val="solid"/>
           </a:ln>
         </p:spPr>
+        <p:txBody>
+          <a:bodyPr/>
+          <a:p/>
+        </p:txBody>
       </p:sp>
       <p:sp>
         <p:nvSpPr>
@@ -7301,6 +7425,10 @@
             </a:outerShdw>
           </a:effectLst>
         </p:spPr>
+        <p:txBody>
+          <a:bodyPr/>
+          <a:p/>
+        </p:txBody>
       </p:sp>
       <p:sp>
         <p:nvSpPr>
@@ -7326,6 +7454,10 @@
             <a:prstDash val="solid"/>
           </a:ln>
         </p:spPr>
+        <p:txBody>
+          <a:bodyPr/>
+          <a:p/>
+        </p:txBody>
       </p:sp>
       <p:sp>
         <p:nvSpPr>
@@ -7504,6 +7636,10 @@
             </a:outerShdw>
           </a:effectLst>
         </p:spPr>
+        <p:txBody>
+          <a:bodyPr/>
+          <a:p/>
+        </p:txBody>
       </p:sp>
       <p:sp>
         <p:nvSpPr>
@@ -7529,6 +7665,10 @@
             <a:prstDash val="solid"/>
           </a:ln>
         </p:spPr>
+        <p:txBody>
+          <a:bodyPr/>
+          <a:p/>
+        </p:txBody>
       </p:sp>
       <p:sp>
         <p:nvSpPr>
@@ -7707,6 +7847,10 @@
             </a:outerShdw>
           </a:effectLst>
         </p:spPr>
+        <p:txBody>
+          <a:bodyPr/>
+          <a:p/>
+        </p:txBody>
       </p:sp>
       <p:sp>
         <p:nvSpPr>
@@ -7732,6 +7876,10 @@
             <a:prstDash val="solid"/>
           </a:ln>
         </p:spPr>
+        <p:txBody>
+          <a:bodyPr/>
+          <a:p/>
+        </p:txBody>
       </p:sp>
       <p:sp>
         <p:nvSpPr>
@@ -7910,6 +8058,10 @@
             </a:outerShdw>
           </a:effectLst>
         </p:spPr>
+        <p:txBody>
+          <a:bodyPr/>
+          <a:p/>
+        </p:txBody>
       </p:sp>
       <p:sp>
         <p:nvSpPr>
@@ -7935,6 +8087,10 @@
             <a:prstDash val="solid"/>
           </a:ln>
         </p:spPr>
+        <p:txBody>
+          <a:bodyPr/>
+          <a:p/>
+        </p:txBody>
       </p:sp>
       <p:sp>
         <p:nvSpPr>
@@ -8212,6 +8368,10 @@
             <a:prstDash val="solid"/>
           </a:ln>
         </p:spPr>
+        <p:txBody>
+          <a:bodyPr/>
+          <a:p/>
+        </p:txBody>
       </p:sp>
       <p:pic>
         <p:nvPicPr>
@@ -11892,6 +12052,10 @@
             </a:outerShdw>
           </a:effectLst>
         </p:spPr>
+        <p:txBody>
+          <a:bodyPr/>
+          <a:p/>
+        </p:txBody>
       </p:sp>
       <p:sp>
         <p:nvSpPr>
@@ -11917,6 +12081,10 @@
             <a:prstDash val="solid"/>
           </a:ln>
         </p:spPr>
+        <p:txBody>
+          <a:bodyPr/>
+          <a:p/>
+        </p:txBody>
       </p:sp>
       <p:sp>
         <p:nvSpPr>
@@ -12095,6 +12263,10 @@
             </a:outerShdw>
           </a:effectLst>
         </p:spPr>
+        <p:txBody>
+          <a:bodyPr/>
+          <a:p/>
+        </p:txBody>
       </p:sp>
       <p:sp>
         <p:nvSpPr>
@@ -12120,6 +12292,10 @@
             <a:prstDash val="solid"/>
           </a:ln>
         </p:spPr>
+        <p:txBody>
+          <a:bodyPr/>
+          <a:p/>
+        </p:txBody>
       </p:sp>
       <p:sp>
         <p:nvSpPr>
@@ -12298,6 +12474,10 @@
             </a:outerShdw>
           </a:effectLst>
         </p:spPr>
+        <p:txBody>
+          <a:bodyPr/>
+          <a:p/>
+        </p:txBody>
       </p:sp>
       <p:sp>
         <p:nvSpPr>
@@ -12323,6 +12503,10 @@
             <a:prstDash val="solid"/>
           </a:ln>
         </p:spPr>
+        <p:txBody>
+          <a:bodyPr/>
+          <a:p/>
+        </p:txBody>
       </p:sp>
       <p:sp>
         <p:nvSpPr>
@@ -12501,6 +12685,10 @@
             </a:outerShdw>
           </a:effectLst>
         </p:spPr>
+        <p:txBody>
+          <a:bodyPr/>
+          <a:p/>
+        </p:txBody>
       </p:sp>
       <p:sp>
         <p:nvSpPr>
@@ -12526,6 +12714,10 @@
             <a:prstDash val="solid"/>
           </a:ln>
         </p:spPr>
+        <p:txBody>
+          <a:bodyPr/>
+          <a:p/>
+        </p:txBody>
       </p:sp>
       <p:sp>
         <p:nvSpPr>
@@ -12704,6 +12896,10 @@
             </a:outerShdw>
           </a:effectLst>
         </p:spPr>
+        <p:txBody>
+          <a:bodyPr/>
+          <a:p/>
+        </p:txBody>
       </p:sp>
       <p:sp>
         <p:nvSpPr>
@@ -12884,6 +13080,10 @@
             <a:prstDash val="solid"/>
           </a:ln>
         </p:spPr>
+        <p:txBody>
+          <a:bodyPr/>
+          <a:p/>
+        </p:txBody>
       </p:sp>
       <p:pic>
         <p:nvPicPr>
@@ -13108,6 +13308,10 @@
             </a:outerShdw>
           </a:effectLst>
         </p:spPr>
+        <p:txBody>
+          <a:bodyPr/>
+          <a:p/>
+        </p:txBody>
       </p:sp>
       <p:sp>
         <p:nvSpPr>
@@ -13300,6 +13504,10 @@
             </a:outerShdw>
           </a:effectLst>
         </p:spPr>
+        <p:txBody>
+          <a:bodyPr/>
+          <a:p/>
+        </p:txBody>
       </p:sp>
       <p:sp>
         <p:nvSpPr>
@@ -13442,6 +13650,10 @@
             </a:outerShdw>
           </a:effectLst>
         </p:spPr>
+        <p:txBody>
+          <a:bodyPr/>
+          <a:p/>
+        </p:txBody>
       </p:sp>
       <p:sp>
         <p:nvSpPr>
@@ -13584,6 +13796,10 @@
             </a:outerShdw>
           </a:effectLst>
         </p:spPr>
+        <p:txBody>
+          <a:bodyPr/>
+          <a:p/>
+        </p:txBody>
       </p:sp>
       <p:sp>
         <p:nvSpPr>
@@ -13742,6 +13958,10 @@
             </a:outerShdw>
           </a:effectLst>
         </p:spPr>
+        <p:txBody>
+          <a:bodyPr/>
+          <a:p/>
+        </p:txBody>
       </p:sp>
       <p:sp>
         <p:nvSpPr>
@@ -13813,7 +14033,7 @@
                   <a:srgbClr val="334155"/>
                 </a:solidFill>
               </a:rPr>
-              <a:t>Each scenario runs on a fresh EVM snapshot: 91 real transactions in 23 seconds, no API key needed. Public-testnet hashes in reports/TESTNET_EVIDENCE.md.</a:t>
+              <a:t>Each scenario runs on a fresh EVM snapshot: 91 real transactions in about 20 seconds, no API key needed. Public-testnet hashes in reports/TESTNET_EVIDENCE.md.</a:t>
             </a:r>
             <a:endParaRPr lang="en-US" sz="1600" dirty="0"/>
           </a:p>

--- a/submission/Kendali_FinTechathon2026_Deck.pptx
+++ b/submission/Kendali_FinTechathon2026_Deck.pptx
@@ -17,9 +17,10 @@
     <p:sldId id="265" r:id="rId11"/>
     <p:sldId id="266" r:id="rId12"/>
     <p:sldId id="267" r:id="rId13"/>
+    <p:sldId id="268" r:id="rId14"/>
   </p:sldIdLst>
   <p:notesMasterIdLst>
-    <p:notesMasterId r:id="rId14"/>
+    <p:notesMasterId r:id="rId15"/>
   </p:notesMasterIdLst>
   <p:sldSz cx="12192000" cy="6858000"/>
   <p:notesSz cx="6858000" cy="12192000"/>
@@ -118,44 +119,45 @@
   <p:extLst>
     <p:ext uri="{521415D9-36F7-43E2-AB2F-B90AF26B5E84}">
       <p14:sectionLst xmlns:p14="http://schemas.microsoft.com/office/powerpoint/2010/main">
-        <p14:section name="Opening" id="{5a4e42b5-69ca-3047-3d61-e2f2f1f6ad2d}">
+        <p14:section name="Opening" id="{da33c8e0-8fba-ba68-ed0a-b717bec8441d}">
           <p14:sldIdLst>
             <p14:sldId id="256"/>
           </p14:sldIdLst>
         </p14:section>
-        <p14:section name="Problem" id="{3855db11-53c0-0cd6-10b2-a852b2083559}">
+        <p14:section name="Problem" id="{0b9d50a1-100c-d484-35fc-9badb8493268}">
           <p14:sldIdLst>
             <p14:sldId id="257"/>
           </p14:sldIdLst>
         </p14:section>
-        <p14:section name="Solution" id="{62b98eac-913b-7809-bc95-33491e326696}">
+        <p14:section name="Solution" id="{61202e1f-9f54-02e4-0700-b3b20071568e}">
           <p14:sldIdLst>
             <p14:sldId id="258"/>
             <p14:sldId id="259"/>
           </p14:sldIdLst>
         </p14:section>
-        <p14:section name="Demo" id="{22b0b24e-f40c-3d90-0c81-8a1a2dcbd536}">
+        <p14:section name="Demo" id="{3f64f868-32f1-dae0-4647-ea769d238be7}">
           <p14:sldIdLst>
             <p14:sldId id="260"/>
           </p14:sldIdLst>
         </p14:section>
-        <p14:section name="Security" id="{168174a2-e808-77f3-c6cd-0ccdf17397d7}">
+        <p14:section name="Security" id="{ff9e4c29-5dad-5843-74c7-4e68bb9f721f}">
           <p14:sldIdLst>
             <p14:sldId id="261"/>
             <p14:sldId id="262"/>
             <p14:sldId id="263"/>
           </p14:sldIdLst>
         </p14:section>
-        <p14:section name="Evidence" id="{d6dbd465-c09f-5324-ac3c-3c01722cd1df}">
+        <p14:section name="Evidence" id="{5287ccf3-11fd-c155-4b7d-7cc9cee6c61f}">
           <p14:sldIdLst>
             <p14:sldId id="264"/>
             <p14:sldId id="265"/>
             <p14:sldId id="266"/>
+            <p14:sldId id="267"/>
           </p14:sldIdLst>
         </p14:section>
-        <p14:section name="Closing" id="{b3134837-2640-d21b-24ac-34b45c898944}">
+        <p14:section name="Closing" id="{3af198a7-9a22-2a2d-044e-7c5d6eb9bdd2}">
           <p14:sldIdLst>
-            <p14:sldId id="267"/>
+            <p14:sldId id="268"/>
           </p14:sldIdLst>
         </p14:section>
       </p14:sectionLst>
@@ -282,10 +284,10 @@
                   <c:v>18</c:v>
                 </c:pt>
                 <c:pt idx="1">
-                  <c:v>55</c:v>
+                  <c:v>84</c:v>
                 </c:pt>
                 <c:pt idx="2">
-                  <c:v>42</c:v>
+                  <c:v>57</c:v>
                 </c:pt>
               </c:numCache>
             </c:numRef>
@@ -908,7 +910,7 @@
           <a:p>
             <a:r>
               <a:rPr lang="en-US" dirty="0"/>
-              <a:t>For a bank, controls matter as much as features. Kendali implements the controls a treasury department would expect: four-eyes approval, segregation of duties, beneficiary verification against business email compromise, cooling-off for new beneficiaries, sanctions screening, limits with time-locked changes, and a kill switch. On the right is what makes the AI auditable: every decision record is hashed before signing, the hash travels inside the transaction, and anyone can later recompute it and check it against the chain. That turns the AI's reasoning into verifiable evidence.</a:t>
+              <a:t>For a bank, controls matter as much as features. Kendali implements the controls a treasury department would expect, from four-eyes approval and beneficiary verification to sanctions screening, time-locked limits and a kill switch. On the right is what makes the AI auditable: every decision record is hashed before signing, the hash travels inside the transaction, and anyone can later recompute it and check it against the chain. That turns the AI's reasoning into verifiable evidence.</a:t>
             </a:r>
             <a:endParaRPr lang="en-US" dirty="0"/>
           </a:p>
@@ -996,7 +998,7 @@
           <a:p>
             <a:r>
               <a:rPr lang="en-US" dirty="0"/>
-              <a:t>To make your evaluation easy, here is how Kendali maps to the three criteria. Task completion: nineteen real tasks done end-to-end with on-chain transactions. Security and compliance: three independent layers, four permission tiers enforced on-chain, twenty-three attacks stopped and invariants proven by fuzzing — plus an honest list of residual risks. Innovation and interaction: on-chain decision anchoring makes the AI verifiable, the bilingual chat fits Indonesian small businesses, and it runs on any OpenAI-compatible model. For the on-chain challenge we built a custom policy vault and a reserve, not just a wallet call.</a:t>
+              <a:t>A question we expect: is this legal? Today it is a sandbox: tUSDC on Sepolia is a valueless test token that proves the controls. In Indonesia, domestic transactions must be settled in Rupiah under the Currency Law, and Bank Indonesia does not allow crypto-assets as a means of payment. In mainland China, public stablecoins are not legal tender for payments. So the production rail is tokenized bank deposits, licensed stablecoins or e-CNY-style rails on a permissioned EVM chain such as WeBank's FISCO BCOS. Our contracts are plain Solidity, so they port with a recompile, and the agent only needs an RPC endpoint and an ABI.</a:t>
             </a:r>
             <a:endParaRPr lang="en-US" dirty="0"/>
           </a:p>
@@ -1084,7 +1086,7 @@
           <a:p>
             <a:r>
               <a:rPr lang="en-US" dirty="0"/>
-              <a:t>To close: Kendali shows that an AI agent can be a real financial participant — paying, approving, saving — while every dangerous power stays behind rules it cannot argue with, and every decision stays verifiable. Our path to production is a multisig owner with session keys, live sanctions feeds and settlement in regulated instruments such as tokenized deposits on permissioned EVM chains like FISCO BCOS, piloting with cross-border small businesses between Indonesia, Singapore and Shenzhen. Autonomy you can verify. Thank you — we are happy to take your questions.</a:t>
+              <a:t>To make your evaluation easy, here is how Kendali maps to the three criteria. Task completion: twenty-two real tasks done end-to-end with on-chain transactions. Security and compliance: three independent layers, four permission tiers enforced on-chain, thirty-five attacks stopped and invariants proven by fuzzing — plus an honest list of residual risks. Innovation and interaction: on-chain decision anchoring makes the AI verifiable, the bilingual chat fits Indonesian small businesses, and it runs on any OpenAI-compatible model. For the on-chain challenge we built a custom policy vault and a reserve, not just a wallet call.</a:t>
             </a:r>
             <a:endParaRPr lang="en-US" dirty="0"/>
           </a:p>
@@ -1108,6 +1110,94 @@
             <a:fld id="{F7021451-1387-4CA6-816F-3879F97B5CBC}" type="slidenum">
               <a:rPr lang="en-US"/>
               <a:t>12</a:t>
+            </a:fld>
+            <a:endParaRPr lang="en-US"/>
+          </a:p>
+        </p:txBody>
+      </p:sp>
+    </p:spTree>
+    <p:extLst>
+      <p:ext uri="{BB962C8B-B14F-4D97-AF65-F5344CB8AC3E}">
+        <p14:creationId xmlns:p14="http://schemas.microsoft.com/office/powerpoint/2010/main" val="1024086991"/>
+      </p:ext>
+    </p:extLst>
+  </p:cSld>
+  <p:clrMapOvr>
+    <a:masterClrMapping/>
+  </p:clrMapOvr>
+</p:notes>
+</file>
+
+<file path=ppt/notesSlides/notesSlide13.xml><?xml version="1.0" encoding="utf-8"?>
+<p:notes xmlns:a="http://schemas.openxmlformats.org/drawingml/2006/main" xmlns:r="http://schemas.openxmlformats.org/officeDocument/2006/relationships" xmlns:p="http://schemas.openxmlformats.org/presentationml/2006/main">
+  <p:cSld>
+    <p:spTree>
+      <p:nvGrpSpPr>
+        <p:cNvPr id="1" name=""/>
+        <p:cNvGrpSpPr/>
+        <p:nvPr/>
+      </p:nvGrpSpPr>
+      <p:grpSpPr>
+        <a:xfrm>
+          <a:off x="0" y="0"/>
+          <a:ext cx="0" cy="0"/>
+          <a:chOff x="0" y="0"/>
+          <a:chExt cx="0" cy="0"/>
+        </a:xfrm>
+      </p:grpSpPr>
+      <p:sp>
+        <p:nvSpPr>
+          <p:cNvPr id="2" name="Slide Image Placeholder 1"/>
+          <p:cNvSpPr>
+            <a:spLocks noGrp="1" noRot="1" noChangeAspect="1"/>
+          </p:cNvSpPr>
+          <p:nvPr>
+            <p:ph type="sldImg"/>
+          </p:nvPr>
+        </p:nvSpPr>
+        <p:spPr/>
+      </p:sp>
+      <p:sp>
+        <p:nvSpPr>
+          <p:cNvPr id="3" name="Notes Placeholder 2"/>
+          <p:cNvSpPr>
+            <a:spLocks noGrp="1"/>
+          </p:cNvSpPr>
+          <p:nvPr>
+            <p:ph type="body" idx="1"/>
+          </p:nvPr>
+        </p:nvSpPr>
+        <p:spPr/>
+        <p:txBody>
+          <a:bodyPr/>
+          <a:lstStyle/>
+          <a:p>
+            <a:r>
+              <a:rPr lang="en-US" dirty="0"/>
+              <a:t>To close: Kendali shows that an AI agent can be a real financial participant — paying, approving, saving — while every dangerous power stays behind rules it cannot argue with, and every decision stays verifiable. Our path to production is a multisig owner with session keys, live sanctions feeds and settlement on the regulated rails we just showed, piloting with cross-border small businesses between Indonesia, Singapore and Shenzhen. Autonomy you can verify. Thank you — we are happy to take your questions.</a:t>
+            </a:r>
+            <a:endParaRPr lang="en-US" dirty="0"/>
+          </a:p>
+        </p:txBody>
+      </p:sp>
+      <p:sp>
+        <p:nvSpPr>
+          <p:cNvPr id="4" name="Slide Number Placeholder 3"/>
+          <p:cNvSpPr>
+            <a:spLocks noGrp="1"/>
+          </p:cNvSpPr>
+          <p:nvPr>
+            <p:ph type="sldNum" sz="quarter" idx="10"/>
+          </p:nvPr>
+        </p:nvSpPr>
+        <p:spPr/>
+        <p:txBody>
+          <a:bodyPr/>
+          <a:lstStyle/>
+          <a:p>
+            <a:fld id="{F7021451-1387-4CA6-816F-3879F97B5CBC}" type="slidenum">
+              <a:rPr lang="en-US"/>
+              <a:t>13</a:t>
             </a:fld>
             <a:endParaRPr lang="en-US"/>
           </a:p>
@@ -1260,7 +1350,7 @@
           <a:p>
             <a:r>
               <a:rPr lang="en-US" dirty="0"/>
-              <a:t>Here is the architecture. Layer one, Understand: an LLM — any OpenAI-compatible model, including DeepSeek or Qwen — together with a deterministic extractor turns invoices and chat into structured data from a closed set of intents. The model never sees a key and never chooses who gets paid. Layer two, Decide: a deterministic policy engine binds every payee to its verified KYB wallet, screens addresses, detects fraud patterns, checks limits, liquidity and due dates, and simulates the exact transaction before signing. Layer three, Enforce: our KendaliVault contract. Even if layers one and two are fully compromised, the agent's key can only pay allow-listed vendors within hard limits. The owner keeps a separate key for approvals, and every decision is hashed and anchored on-chain for audit.</a:t>
+              <a:t>Here is the architecture. Layer one, Understand: an LLM — any OpenAI-compatible model, including DeepSeek or Qwen — together with a deterministic extractor turns invoices and chat into structured data from a closed set of intents. The model never sees a key and never chooses who gets paid. Layer two, Decide: a deterministic policy engine binds every payee to its verified KYB wallet, checks that the invoice matches an open purchase order, screens addresses, detects fraud patterns, checks limits, liquidity and due dates, and simulates the exact transaction before signing. Layer three, Enforce: our KendaliVault contract. Even if layers one and two are fully compromised, the agent's key can only pay allow-listed vendors within hard limits. The owner keeps a separate key for approvals, and every decision is hashed and anchored on-chain for audit.</a:t>
             </a:r>
             <a:endParaRPr lang="en-US" dirty="0"/>
           </a:p>
@@ -1436,7 +1526,7 @@
           <a:p>
             <a:r>
               <a:rPr lang="en-US" dirty="0"/>
-              <a:t>Here is the live console. The owner types one sentence: pay all invoices due this week. Thirteen invoices are waiting. In a few seconds Kendali pays the one invoice that passes every check, sends four to the owner's approval queue — a large one, a new payee still in its cooling-off period, an amount anomaly and an invoice that does not add up — holds one that is not yet due, and blocks seven attacks. The blocked ones include a business-email-compromise invoice with a changed wallet, a prompt injection hidden in the notes, a duplicate reminder, a homoglyph imitation of a real vendor, an address-poisoning decoy, an unknown issuer and a sanctioned counterparty. Not a single token reached an attacker, and every blocked decision is anchored on-chain.</a:t>
+              <a:t>Here is the live console. The owner types one sentence: pay all invoices due this week. Thirteen invoices are waiting. In a few seconds Kendali pays the one invoice that passes every check, sends four to the owner's approval queue — a large one, a new payee still in its cooling-off period, an amount anomaly and an invoice that does not add up — holds one that is not yet due, and blocks seven attacks. Not a single token reached an attacker, and every blocked decision is anchored on-chain.</a:t>
             </a:r>
             <a:endParaRPr lang="en-US" dirty="0"/>
           </a:p>
@@ -1524,7 +1614,7 @@
           <a:p>
             <a:r>
               <a:rPr lang="en-US" dirty="0"/>
-              <a:t>We attacked our own agent systematically: twenty-three attack scenarios. Document-level attacks such as business email compromise, prompt injection in English and Indonesian — even split with invisible zero-width characters — address poisoning, homoglyph names, sanctioned vendors and duplicates are all blocked. Suspicious but possibly legitimate cases, like an inflated amount, go to a human instead of being paid. Chat attacks — pretending to be the owner, asking to pay a raw address, to raise a limit or to grant a token allowance — are refused by deterministic mandate checks that the LLM cannot override. And with a stolen agent key, all six on-chain attack variants revert. Even tampering with our own audit log is detected.</a:t>
+              <a:t>We attacked our own agent systematically: thirty-five attack scenarios. Document-level attacks such as business email compromise, prompt injection in English and Indonesian — even split with invisible zero-width characters — address poisoning, homoglyph names, sanctioned vendors and duplicates are all blocked. A fake invoice from a real vendor, sent to the right wallet but for goods we never ordered, is caught by purchase-order matching and goes to the owner, even when its notes claim the owner already approved it. Chat attacks — pretending to be the owner, asking to pay a raw address, to raise a limit or to grant a token allowance — are refused by deterministic mandate checks that the LLM cannot override. And with a stolen agent key, all six on-chain attack variants revert. Even tampering with our own audit log is detected.</a:t>
             </a:r>
             <a:endParaRPr lang="en-US" dirty="0"/>
           </a:p>
@@ -1700,7 +1790,7 @@
           <a:p>
             <a:r>
               <a:rPr lang="en-US" dirty="0"/>
-              <a:t>This is the contract layer, KendaliVault. On the left you see our live red-team button: we sign attacks with the agent's own key — pay the attacker, pay above the limit, add a payee, raise limits, approve our own proposal, unpause — and the contract rejects every one, with a precise custom error. The rules are simple: an allow-list with cooling-off, solo limits per payment and per day, owner approval above that, a two-day timelock on loosening, and a circuit breaker. We did not just unit-test this. Stateful fuzzing throws thousands of random call sequences at the vault, and four invariants always hold: the attacker is never paid, daily outflow never exceeds the limit, governance never changes and custody is conserved.</a:t>
+              <a:t>This is the contract layer, KendaliVault. On the left is our live red-team button: we sign attacks with the agent's own key, and the contract rejects every one with a precise custom error. The rules are simple: an allow-list with cooling-off, solo limits per payment and per day, owner approval above that, a two-day timelock on loosening, and a circuit breaker. Stateful fuzzing throws thousands of random call sequences at the vault, and four invariants always hold: the attacker is never paid, daily outflow never exceeds the limit, governance never changes and custody is conserved.</a:t>
             </a:r>
             <a:endParaRPr lang="en-US" dirty="0"/>
           </a:p>
@@ -1788,7 +1878,7 @@
           <a:p>
             <a:r>
               <a:rPr lang="en-US" dirty="0"/>
-              <a:t>Everything we just claimed is measured. Our evaluation harness runs forty-two scenarios — nineteen legitimate tasks and twenty-three attacks — each on a fresh blockchain snapshot. All forty-two pass: one hundred percent task completion, one hundred percent attack prevention, and zero tokens to any attacker wallet. Underneath that sit eighteen smart-contract tests including fuzzing and invariants, and fifty-five Python tests, including the LLM path and an end-to-end on-chain run. Judges can reproduce everything with three commands and no API key, and our public-testnet run provides real transaction hashes, including a reverted stolen-key transaction.</a:t>
+              <a:t>Everything we just claimed is measured. Our evaluation harness runs fifty-seven scenarios — twenty-two legitimate tasks and thirty-five attacks — each on a fresh blockchain snapshot. All fifty-seven pass: one hundred percent task completion, one hundred percent attack prevention, and zero tokens to any attacker wallet. Fifteen of them came from a red-team round against our own agent: it found a fake invoice that was paid and a real invoice that was wrongly blocked, and we fixed both. Underneath that sit eighteen smart-contract tests including fuzzing and invariants, and eighty-four Python tests, including the LLM path and an end-to-end on-chain run. Judges can reproduce everything with three commands and no API key, and our public-testnet run provides real transaction hashes, including a reverted stolen-key transaction.</a:t>
             </a:r>
             <a:endParaRPr lang="en-US" dirty="0"/>
           </a:p>
@@ -2709,10 +2799,6 @@
             <a:prstDash val="solid"/>
           </a:ln>
         </p:spPr>
-        <p:txBody>
-          <a:bodyPr/>
-          <a:p/>
-        </p:txBody>
       </p:sp>
       <p:sp>
         <p:nvSpPr>
@@ -2790,10 +2876,6 @@
             <a:prstDash val="solid"/>
           </a:ln>
         </p:spPr>
-        <p:txBody>
-          <a:bodyPr/>
-          <a:p/>
-        </p:txBody>
       </p:sp>
       <p:sp>
         <p:nvSpPr>
@@ -2871,10 +2953,6 @@
             <a:prstDash val="solid"/>
           </a:ln>
         </p:spPr>
-        <p:txBody>
-          <a:bodyPr/>
-          <a:p/>
-        </p:txBody>
       </p:sp>
       <p:sp>
         <p:nvSpPr>
@@ -4323,10 +4401,6 @@
             <a:prstDash val="solid"/>
           </a:ln>
         </p:spPr>
-        <p:txBody>
-          <a:bodyPr/>
-          <a:p/>
-        </p:txBody>
       </p:sp>
       <p:sp>
         <p:nvSpPr>
@@ -4402,10 +4476,6 @@
             <a:prstDash val="solid"/>
           </a:ln>
         </p:spPr>
-        <p:txBody>
-          <a:bodyPr/>
-          <a:p/>
-        </p:txBody>
       </p:sp>
       <p:sp>
         <p:nvSpPr>
@@ -4433,10 +4503,6 @@
             <a:prstDash val="solid"/>
           </a:ln>
         </p:spPr>
-        <p:txBody>
-          <a:bodyPr/>
-          <a:p/>
-        </p:txBody>
       </p:sp>
       <p:sp>
         <p:nvSpPr>
@@ -4512,10 +4578,6 @@
             <a:prstDash val="solid"/>
           </a:ln>
         </p:spPr>
-        <p:txBody>
-          <a:bodyPr/>
-          <a:p/>
-        </p:txBody>
       </p:sp>
       <p:sp>
         <p:nvSpPr>
@@ -4543,10 +4605,6 @@
             <a:prstDash val="solid"/>
           </a:ln>
         </p:spPr>
-        <p:txBody>
-          <a:bodyPr/>
-          <a:p/>
-        </p:txBody>
       </p:sp>
       <p:sp>
         <p:nvSpPr>
@@ -4622,10 +4680,6 @@
             <a:prstDash val="solid"/>
           </a:ln>
         </p:spPr>
-        <p:txBody>
-          <a:bodyPr/>
-          <a:p/>
-        </p:txBody>
       </p:sp>
       <p:sp>
         <p:nvSpPr>
@@ -4653,10 +4707,6 @@
             <a:prstDash val="solid"/>
           </a:ln>
         </p:spPr>
-        <p:txBody>
-          <a:bodyPr/>
-          <a:p/>
-        </p:txBody>
       </p:sp>
       <p:sp>
         <p:nvSpPr>
@@ -4810,7 +4860,7 @@
                   <a:schemeClr val="tx1"/>
                 </a:solidFill>
               </a:rPr>
-              <a:t>Mapped to the judging criteria</a:t>
+              <a:t>Regulatory path: Indonesia &amp; China</a:t>
             </a:r>
             <a:endParaRPr lang="en-US" sz="3400" dirty="0"/>
           </a:p>
@@ -4818,18 +4868,102 @@
       </p:sp>
       <p:sp>
         <p:nvSpPr>
-          <p:cNvPr id="3" name="crit0"/>
+          <p:cNvPr id="3" name="sandbox"/>
           <p:cNvSpPr/>
           <p:nvPr/>
         </p:nvSpPr>
         <p:spPr>
           <a:xfrm>
             <a:off x="548640" y="1691640"/>
-            <a:ext cx="3520440" cy="3337560"/>
+            <a:ext cx="5212080" cy="1234440"/>
           </a:xfrm>
           <a:prstGeom prst="roundRect">
             <a:avLst>
-              <a:gd name="adj" fmla="val 3288"/>
+              <a:gd name="adj" fmla="val 8889"/>
+            </a:avLst>
+          </a:prstGeom>
+          <a:solidFill>
+            <a:srgbClr val="F1F5F9"/>
+          </a:solidFill>
+          <a:ln w="12700">
+            <a:solidFill>
+              <a:srgbClr val="E2E8F0"/>
+            </a:solidFill>
+            <a:prstDash val="solid"/>
+          </a:ln>
+          <a:effectLst>
+            <a:outerShdw sx="100000" sy="100000" kx="0" ky="0" algn="bl" rotWithShape="0" blurRad="76200" dist="25400" dir="5400000">
+              <a:srgbClr val="94A3B8">
+                <a:alpha val="25000"/>
+              </a:srgbClr>
+            </a:outerShdw>
+          </a:effectLst>
+        </p:spPr>
+      </p:sp>
+      <p:sp>
+        <p:nvSpPr>
+          <p:cNvPr id="4" name="Text 2"/>
+          <p:cNvSpPr txBox="1"/>
+          <p:nvPr/>
+        </p:nvSpPr>
+        <p:spPr>
+          <a:xfrm>
+            <a:off x="777240" y="1828800"/>
+            <a:ext cx="4800600" cy="1005840"/>
+          </a:xfrm>
+          <a:prstGeom prst="rect">
+            <a:avLst/>
+          </a:prstGeom>
+          <a:noFill/>
+          <a:ln/>
+        </p:spPr>
+        <p:txBody>
+          <a:bodyPr wrap="square" lIns="0" tIns="0" rIns="0" bIns="0" rtlCol="0" anchor="t"/>
+          <a:lstStyle/>
+          <a:p>
+            <a:pPr indent="0" marL="0">
+              <a:buNone/>
+            </a:pPr>
+            <a:r>
+              <a:rPr lang="en-US" sz="1500" b="1" dirty="0">
+                <a:solidFill>
+                  <a:srgbClr val="B45309"/>
+                </a:solidFill>
+              </a:rPr>
+              <a:t>Today: a sandbox, not a payment product</a:t>
+            </a:r>
+            <a:endParaRPr lang="en-US" sz="1500" dirty="0"/>
+          </a:p>
+          <a:p>
+            <a:pPr indent="0" marL="0">
+              <a:buNone/>
+            </a:pPr>
+            <a:r>
+              <a:rPr lang="en-US" sz="1500" dirty="0">
+                <a:solidFill>
+                  <a:srgbClr val="334155"/>
+                </a:solidFill>
+              </a:rPr>
+              <a:t>tUSDC on the Sepolia testnet is a valueless test token, used only to prove the controls.</a:t>
+            </a:r>
+            <a:endParaRPr lang="en-US" sz="1500" dirty="0"/>
+          </a:p>
+        </p:txBody>
+      </p:sp>
+      <p:sp>
+        <p:nvSpPr>
+          <p:cNvPr id="5" name="ruleID"/>
+          <p:cNvSpPr/>
+          <p:nvPr/>
+        </p:nvSpPr>
+        <p:spPr>
+          <a:xfrm>
+            <a:off x="548640" y="3154680"/>
+            <a:ext cx="5212080" cy="1325880"/>
+          </a:xfrm>
+          <a:prstGeom prst="roundRect">
+            <a:avLst>
+              <a:gd name="adj" fmla="val 8276"/>
             </a:avLst>
           </a:prstGeom>
           <a:solidFill>
@@ -4849,52 +4983,42 @@
             </a:outerShdw>
           </a:effectLst>
         </p:spPr>
-        <p:txBody>
-          <a:bodyPr/>
-          <a:p/>
-        </p:txBody>
-      </p:sp>
-      <p:sp>
-        <p:nvSpPr>
-          <p:cNvPr id="4" name="Shape 2"/>
+      </p:sp>
+      <p:sp>
+        <p:nvSpPr>
+          <p:cNvPr id="6" name="Shape 4"/>
           <p:cNvSpPr/>
           <p:nvPr/>
         </p:nvSpPr>
         <p:spPr>
           <a:xfrm>
-            <a:off x="777240" y="1874520"/>
-            <a:ext cx="3063240" cy="548640"/>
-          </a:xfrm>
-          <a:prstGeom prst="roundRect">
-            <a:avLst>
-              <a:gd name="adj" fmla="val 13333"/>
-            </a:avLst>
+            <a:off x="777240" y="3538728"/>
+            <a:ext cx="548640" cy="548640"/>
+          </a:xfrm>
+          <a:prstGeom prst="ellipse">
+            <a:avLst/>
           </a:prstGeom>
           <a:solidFill>
-            <a:srgbClr val="0F766E"/>
+            <a:srgbClr val="B91C1C"/>
           </a:solidFill>
           <a:ln w="12700">
             <a:solidFill>
-              <a:srgbClr val="0F766E"/>
+              <a:srgbClr val="B91C1C"/>
             </a:solidFill>
             <a:prstDash val="solid"/>
           </a:ln>
         </p:spPr>
-        <p:txBody>
-          <a:bodyPr/>
-          <a:p/>
-        </p:txBody>
-      </p:sp>
-      <p:sp>
-        <p:nvSpPr>
-          <p:cNvPr id="5" name="Text 3"/>
+      </p:sp>
+      <p:sp>
+        <p:nvSpPr>
+          <p:cNvPr id="7" name="Text 5"/>
           <p:cNvSpPr txBox="1"/>
           <p:nvPr/>
         </p:nvSpPr>
         <p:spPr>
           <a:xfrm>
-            <a:off x="777240" y="1874520"/>
-            <a:ext cx="3063240" cy="548640"/>
+            <a:off x="777240" y="3538728"/>
+            <a:ext cx="548640" cy="548640"/>
           </a:xfrm>
           <a:prstGeom prst="rect">
             <a:avLst/>
@@ -4915,7 +5039,7 @@
                   <a:srgbClr val="FFFFFF"/>
                 </a:solidFill>
               </a:rPr>
-              <a:t>Task completion · 40%</a:t>
+              <a:t>ID</a:t>
             </a:r>
             <a:endParaRPr lang="en-US" sz="1500" dirty="0"/>
           </a:p>
@@ -4923,14 +5047,14 @@
       </p:sp>
       <p:sp>
         <p:nvSpPr>
-          <p:cNvPr id="6" name="Text 4"/>
+          <p:cNvPr id="8" name="Text 6"/>
           <p:cNvSpPr txBox="1"/>
           <p:nvPr/>
         </p:nvSpPr>
         <p:spPr>
           <a:xfrm>
-            <a:off x="822960" y="2606040"/>
-            <a:ext cx="3017520" cy="2331720"/>
+            <a:off x="1554480" y="3291840"/>
+            <a:ext cx="4023360" cy="365760"/>
           </a:xfrm>
           <a:prstGeom prst="rect">
             <a:avLst/>
@@ -4942,75 +5066,71 @@
           <a:bodyPr wrap="square" lIns="0" tIns="0" rIns="0" bIns="0" rtlCol="0" anchor="t"/>
           <a:lstStyle/>
           <a:p>
-            <a:pPr marL="342900" indent="-342900">
-              <a:spcAft>
-                <a:spcPts val="800"/>
-              </a:spcAft>
-              <a:buSzPct val="100000"/>
-              <a:buChar char="•"/>
-            </a:pPr>
-            <a:r>
-              <a:rPr lang="en-US" sz="1400" dirty="0">
+            <a:pPr indent="0" marL="0">
+              <a:buNone/>
+            </a:pPr>
+            <a:r>
+              <a:rPr lang="en-US" sz="1700" b="1" dirty="0">
+                <a:solidFill>
+                  <a:srgbClr val="0F172A"/>
+                </a:solidFill>
+              </a:rPr>
+              <a:t>Indonesia</a:t>
+            </a:r>
+            <a:endParaRPr lang="en-US" sz="1700" dirty="0"/>
+          </a:p>
+        </p:txBody>
+      </p:sp>
+      <p:sp>
+        <p:nvSpPr>
+          <p:cNvPr id="9" name="Text 7"/>
+          <p:cNvSpPr txBox="1"/>
+          <p:nvPr/>
+        </p:nvSpPr>
+        <p:spPr>
+          <a:xfrm>
+            <a:off x="1554480" y="3657600"/>
+            <a:ext cx="4023360" cy="777240"/>
+          </a:xfrm>
+          <a:prstGeom prst="rect">
+            <a:avLst/>
+          </a:prstGeom>
+          <a:noFill/>
+          <a:ln/>
+        </p:spPr>
+        <p:txBody>
+          <a:bodyPr wrap="square" lIns="0" tIns="0" rIns="0" bIns="0" rtlCol="0" anchor="t"/>
+          <a:lstStyle/>
+          <a:p>
+            <a:pPr indent="0" marL="0">
+              <a:buNone/>
+            </a:pPr>
+            <a:r>
+              <a:rPr lang="en-US" sz="1300" dirty="0">
                 <a:solidFill>
                   <a:srgbClr val="334155"/>
                 </a:solidFill>
               </a:rPr>
-              <a:t>19/19 legitimate tasks completed end-to-end with real transactions</a:t>
-            </a:r>
-            <a:endParaRPr lang="en-US" sz="1400" dirty="0"/>
-          </a:p>
-          <a:p>
-            <a:pPr marL="342900" indent="-342900">
-              <a:spcAft>
-                <a:spcPts val="800"/>
-              </a:spcAft>
-              <a:buSzPct val="100000"/>
-              <a:buChar char="•"/>
-            </a:pPr>
-            <a:r>
-              <a:rPr lang="en-US" sz="1400" dirty="0">
-                <a:solidFill>
-                  <a:srgbClr val="334155"/>
-                </a:solidFill>
-              </a:rPr>
-              <a:t>Invoices in EN/ID, text and PDF; maker-checker; recurring; treasury; chat</a:t>
-            </a:r>
-            <a:endParaRPr lang="en-US" sz="1400" dirty="0"/>
-          </a:p>
-          <a:p>
-            <a:pPr marL="342900" indent="-342900">
-              <a:spcAft>
-                <a:spcPts val="800"/>
-              </a:spcAft>
-              <a:buSzPct val="100000"/>
-              <a:buChar char="•"/>
-            </a:pPr>
-            <a:r>
-              <a:rPr lang="en-US" sz="1400" dirty="0">
-                <a:solidFill>
-                  <a:srgbClr val="334155"/>
-                </a:solidFill>
-              </a:rPr>
-              <a:t>Public-testnet execution log with transaction hashes</a:t>
-            </a:r>
-            <a:endParaRPr lang="en-US" sz="1400" dirty="0"/>
-          </a:p>
-        </p:txBody>
-      </p:sp>
-      <p:sp>
-        <p:nvSpPr>
-          <p:cNvPr id="7" name="crit1"/>
+              <a:t>Domestic transactions must be settled in Rupiah (UU 7/2011 on Currency); Bank Indonesia does not allow crypto-assets as a means of payment.</a:t>
+            </a:r>
+            <a:endParaRPr lang="en-US" sz="1300" dirty="0"/>
+          </a:p>
+        </p:txBody>
+      </p:sp>
+      <p:sp>
+        <p:nvSpPr>
+          <p:cNvPr id="10" name="ruleCN"/>
           <p:cNvSpPr/>
           <p:nvPr/>
         </p:nvSpPr>
         <p:spPr>
           <a:xfrm>
-            <a:off x="4297680" y="1691640"/>
-            <a:ext cx="3520440" cy="3337560"/>
+            <a:off x="548640" y="4663440"/>
+            <a:ext cx="5212080" cy="1325880"/>
           </a:xfrm>
           <a:prstGeom prst="roundRect">
             <a:avLst>
-              <a:gd name="adj" fmla="val 3288"/>
+              <a:gd name="adj" fmla="val 8276"/>
             </a:avLst>
           </a:prstGeom>
           <a:solidFill>
@@ -5030,26 +5150,20 @@
             </a:outerShdw>
           </a:effectLst>
         </p:spPr>
-        <p:txBody>
-          <a:bodyPr/>
-          <a:p/>
-        </p:txBody>
-      </p:sp>
-      <p:sp>
-        <p:nvSpPr>
-          <p:cNvPr id="8" name="Shape 6"/>
+      </p:sp>
+      <p:sp>
+        <p:nvSpPr>
+          <p:cNvPr id="11" name="Shape 9"/>
           <p:cNvSpPr/>
           <p:nvPr/>
         </p:nvSpPr>
         <p:spPr>
           <a:xfrm>
-            <a:off x="4526280" y="1874520"/>
-            <a:ext cx="3063240" cy="548640"/>
-          </a:xfrm>
-          <a:prstGeom prst="roundRect">
-            <a:avLst>
-              <a:gd name="adj" fmla="val 13333"/>
-            </a:avLst>
+            <a:off x="777240" y="5047488"/>
+            <a:ext cx="548640" cy="548640"/>
+          </a:xfrm>
+          <a:prstGeom prst="ellipse">
+            <a:avLst/>
           </a:prstGeom>
           <a:solidFill>
             <a:srgbClr val="B91C1C"/>
@@ -5061,21 +5175,17 @@
             <a:prstDash val="solid"/>
           </a:ln>
         </p:spPr>
-        <p:txBody>
-          <a:bodyPr/>
-          <a:p/>
-        </p:txBody>
-      </p:sp>
-      <p:sp>
-        <p:nvSpPr>
-          <p:cNvPr id="9" name="Text 7"/>
+      </p:sp>
+      <p:sp>
+        <p:nvSpPr>
+          <p:cNvPr id="12" name="Text 10"/>
           <p:cNvSpPr txBox="1"/>
           <p:nvPr/>
         </p:nvSpPr>
         <p:spPr>
           <a:xfrm>
-            <a:off x="4526280" y="1874520"/>
-            <a:ext cx="3063240" cy="548640"/>
+            <a:off x="777240" y="5047488"/>
+            <a:ext cx="548640" cy="548640"/>
           </a:xfrm>
           <a:prstGeom prst="rect">
             <a:avLst/>
@@ -5096,7 +5206,7 @@
                   <a:srgbClr val="FFFFFF"/>
                 </a:solidFill>
               </a:rPr>
-              <a:t>Security &amp; compliance · 30%</a:t>
+              <a:t>CN</a:t>
             </a:r>
             <a:endParaRPr lang="en-US" sz="1500" dirty="0"/>
           </a:p>
@@ -5104,14 +5214,14 @@
       </p:sp>
       <p:sp>
         <p:nvSpPr>
-          <p:cNvPr id="10" name="Text 8"/>
+          <p:cNvPr id="13" name="Text 11"/>
           <p:cNvSpPr txBox="1"/>
           <p:nvPr/>
         </p:nvSpPr>
         <p:spPr>
           <a:xfrm>
-            <a:off x="4572000" y="2606040"/>
-            <a:ext cx="3017520" cy="2331720"/>
+            <a:off x="1554480" y="4800600"/>
+            <a:ext cx="4023360" cy="365760"/>
           </a:xfrm>
           <a:prstGeom prst="rect">
             <a:avLst/>
@@ -5123,113 +5233,71 @@
           <a:bodyPr wrap="square" lIns="0" tIns="0" rIns="0" bIns="0" rtlCol="0" anchor="t"/>
           <a:lstStyle/>
           <a:p>
-            <a:pPr marL="342900" indent="-342900">
-              <a:spcAft>
-                <a:spcPts val="800"/>
-              </a:spcAft>
-              <a:buSzPct val="100000"/>
-              <a:buChar char="•"/>
-            </a:pPr>
-            <a:r>
-              <a:rPr lang="en-US" sz="1400" dirty="0">
+            <a:pPr indent="0" marL="0">
+              <a:buNone/>
+            </a:pPr>
+            <a:r>
+              <a:rPr lang="en-US" sz="1700" b="1" dirty="0">
+                <a:solidFill>
+                  <a:srgbClr val="0F172A"/>
+                </a:solidFill>
+              </a:rPr>
+              <a:t>Mainland China</a:t>
+            </a:r>
+            <a:endParaRPr lang="en-US" sz="1700" dirty="0"/>
+          </a:p>
+        </p:txBody>
+      </p:sp>
+      <p:sp>
+        <p:nvSpPr>
+          <p:cNvPr id="14" name="Text 12"/>
+          <p:cNvSpPr txBox="1"/>
+          <p:nvPr/>
+        </p:nvSpPr>
+        <p:spPr>
+          <a:xfrm>
+            <a:off x="1554480" y="5166360"/>
+            <a:ext cx="4023360" cy="777240"/>
+          </a:xfrm>
+          <a:prstGeom prst="rect">
+            <a:avLst/>
+          </a:prstGeom>
+          <a:noFill/>
+          <a:ln/>
+        </p:spPr>
+        <p:txBody>
+          <a:bodyPr wrap="square" lIns="0" tIns="0" rIns="0" bIns="0" rtlCol="0" anchor="t"/>
+          <a:lstStyle/>
+          <a:p>
+            <a:pPr indent="0" marL="0">
+              <a:buNone/>
+            </a:pPr>
+            <a:r>
+              <a:rPr lang="en-US" sz="1300" dirty="0">
                 <a:solidFill>
                   <a:srgbClr val="334155"/>
                 </a:solidFill>
               </a:rPr>
-              <a:t>Three independent layers; four permission tiers enforced on-chain</a:t>
-            </a:r>
-            <a:endParaRPr lang="en-US" sz="1400" dirty="0"/>
-          </a:p>
-          <a:p>
-            <a:pPr marL="342900" indent="-342900">
-              <a:spcAft>
-                <a:spcPts val="800"/>
-              </a:spcAft>
-              <a:buSzPct val="100000"/>
-              <a:buChar char="•"/>
-            </a:pPr>
-            <a:r>
-              <a:rPr lang="en-US" sz="1400" dirty="0">
-                <a:solidFill>
-                  <a:srgbClr val="334155"/>
-                </a:solidFill>
-              </a:rPr>
-              <a:t>23/23 attacks stopped, including a stolen agent key</a:t>
-            </a:r>
-            <a:endParaRPr lang="en-US" sz="1400" dirty="0"/>
-          </a:p>
-          <a:p>
-            <a:pPr marL="342900" indent="-342900">
-              <a:spcAft>
-                <a:spcPts val="800"/>
-              </a:spcAft>
-              <a:buSzPct val="100000"/>
-              <a:buChar char="•"/>
-            </a:pPr>
-            <a:r>
-              <a:rPr lang="en-US" sz="1400" dirty="0">
-                <a:solidFill>
-                  <a:srgbClr val="334155"/>
-                </a:solidFill>
-              </a:rPr>
-              <a:t>Fuzz-proven invariants; honest risk register in the self-assessment</a:t>
-            </a:r>
-            <a:endParaRPr lang="en-US" sz="1400" dirty="0"/>
-          </a:p>
-        </p:txBody>
-      </p:sp>
-      <p:sp>
-        <p:nvSpPr>
-          <p:cNvPr id="11" name="crit2"/>
+              <a:t>Public stablecoins and other virtual currencies are not legal tender and may not be used for payments.</a:t>
+            </a:r>
+            <a:endParaRPr lang="en-US" sz="1300" dirty="0"/>
+          </a:p>
+        </p:txBody>
+      </p:sp>
+      <p:sp>
+        <p:nvSpPr>
+          <p:cNvPr id="15" name="Shape 13"/>
           <p:cNvSpPr/>
           <p:nvPr/>
         </p:nvSpPr>
         <p:spPr>
           <a:xfrm>
-            <a:off x="8046720" y="1691640"/>
-            <a:ext cx="3520440" cy="3337560"/>
+            <a:off x="6309360" y="1691640"/>
+            <a:ext cx="5303520" cy="868680"/>
           </a:xfrm>
           <a:prstGeom prst="roundRect">
             <a:avLst>
-              <a:gd name="adj" fmla="val 3288"/>
-            </a:avLst>
-          </a:prstGeom>
-          <a:solidFill>
-            <a:srgbClr val="FFFFFF"/>
-          </a:solidFill>
-          <a:ln w="12700">
-            <a:solidFill>
-              <a:srgbClr val="E2E8F0"/>
-            </a:solidFill>
-            <a:prstDash val="solid"/>
-          </a:ln>
-          <a:effectLst>
-            <a:outerShdw sx="100000" sy="100000" kx="0" ky="0" algn="bl" rotWithShape="0" blurRad="76200" dist="25400" dir="5400000">
-              <a:srgbClr val="94A3B8">
-                <a:alpha val="25000"/>
-              </a:srgbClr>
-            </a:outerShdw>
-          </a:effectLst>
-        </p:spPr>
-        <p:txBody>
-          <a:bodyPr/>
-          <a:p/>
-        </p:txBody>
-      </p:sp>
-      <p:sp>
-        <p:nvSpPr>
-          <p:cNvPr id="12" name="Shape 10"/>
-          <p:cNvSpPr/>
-          <p:nvPr/>
-        </p:nvSpPr>
-        <p:spPr>
-          <a:xfrm>
-            <a:off x="8275320" y="1874520"/>
-            <a:ext cx="3063240" cy="548640"/>
-          </a:xfrm>
-          <a:prstGeom prst="roundRect">
-            <a:avLst>
-              <a:gd name="adj" fmla="val 13333"/>
+              <a:gd name="adj" fmla="val 10526"/>
             </a:avLst>
           </a:prstGeom>
           <a:solidFill>
@@ -5242,21 +5310,17 @@
             <a:prstDash val="solid"/>
           </a:ln>
         </p:spPr>
-        <p:txBody>
-          <a:bodyPr/>
-          <a:p/>
-        </p:txBody>
-      </p:sp>
-      <p:sp>
-        <p:nvSpPr>
-          <p:cNvPr id="13" name="Text 11"/>
+      </p:sp>
+      <p:sp>
+        <p:nvSpPr>
+          <p:cNvPr id="16" name="Text 14"/>
           <p:cNvSpPr txBox="1"/>
           <p:nvPr/>
         </p:nvSpPr>
         <p:spPr>
           <a:xfrm>
-            <a:off x="8275320" y="1874520"/>
-            <a:ext cx="3063240" cy="548640"/>
+            <a:off x="6492240" y="1783080"/>
+            <a:ext cx="4937760" cy="713232"/>
           </a:xfrm>
           <a:prstGeom prst="rect">
             <a:avLst/>
@@ -5268,7 +5332,7 @@
           <a:bodyPr wrap="square" lIns="0" tIns="0" rIns="0" bIns="0" rtlCol="0" anchor="ctr"/>
           <a:lstStyle/>
           <a:p>
-            <a:pPr algn="ctr" indent="0" marL="0">
+            <a:pPr indent="0" marL="0">
               <a:buNone/>
             </a:pPr>
             <a:r>
@@ -5277,136 +5341,88 @@
                   <a:srgbClr val="FFFFFF"/>
                 </a:solidFill>
               </a:rPr>
-              <a:t>Innovation &amp; interaction · 30%</a:t>
+              <a:t>Production rail</a:t>
             </a:r>
             <a:endParaRPr lang="en-US" sz="1500" dirty="0"/>
           </a:p>
-        </p:txBody>
-      </p:sp>
-      <p:sp>
-        <p:nvSpPr>
-          <p:cNvPr id="14" name="Text 12"/>
-          <p:cNvSpPr txBox="1"/>
-          <p:nvPr/>
-        </p:nvSpPr>
-        <p:spPr>
-          <a:xfrm>
-            <a:off x="8321040" y="2606040"/>
-            <a:ext cx="3017520" cy="2331720"/>
-          </a:xfrm>
-          <a:prstGeom prst="rect">
-            <a:avLst/>
-          </a:prstGeom>
-          <a:noFill/>
-          <a:ln/>
-        </p:spPr>
-        <p:txBody>
-          <a:bodyPr wrap="square" lIns="0" tIns="0" rIns="0" bIns="0" rtlCol="0" anchor="t"/>
-          <a:lstStyle/>
-          <a:p>
-            <a:pPr marL="342900" indent="-342900">
-              <a:spcAft>
-                <a:spcPts val="800"/>
-              </a:spcAft>
-              <a:buSzPct val="100000"/>
-              <a:buChar char="•"/>
-            </a:pPr>
-            <a:r>
-              <a:rPr lang="en-US" sz="1400" dirty="0">
-                <a:solidFill>
-                  <a:srgbClr val="334155"/>
-                </a:solidFill>
-              </a:rPr>
-              <a:t>Decision hashes anchored on-chain: verifiable AI</a:t>
-            </a:r>
-            <a:endParaRPr lang="en-US" sz="1400" dirty="0"/>
-          </a:p>
-          <a:p>
-            <a:pPr marL="342900" indent="-342900">
-              <a:spcAft>
-                <a:spcPts val="800"/>
-              </a:spcAft>
-              <a:buSzPct val="100000"/>
-              <a:buChar char="•"/>
-            </a:pPr>
-            <a:r>
-              <a:rPr lang="en-US" sz="1400" dirty="0">
-                <a:solidFill>
-                  <a:srgbClr val="334155"/>
-                </a:solidFill>
-              </a:rPr>
-              <a:t>Bilingual chat for Indonesian SMEs; one-click red-team and audit</a:t>
-            </a:r>
-            <a:endParaRPr lang="en-US" sz="1400" dirty="0"/>
-          </a:p>
-          <a:p>
-            <a:pPr marL="342900" indent="-342900">
-              <a:spcAft>
-                <a:spcPts val="800"/>
-              </a:spcAft>
-              <a:buSzPct val="100000"/>
-              <a:buChar char="•"/>
-            </a:pPr>
-            <a:r>
-              <a:rPr lang="en-US" sz="1400" dirty="0">
-                <a:solidFill>
-                  <a:srgbClr val="334155"/>
-                </a:solidFill>
-              </a:rPr>
-              <a:t>Works with any OpenAI-compatible model, including DeepSeek and Qwen</a:t>
-            </a:r>
-            <a:endParaRPr lang="en-US" sz="1400" dirty="0"/>
-          </a:p>
-        </p:txBody>
-      </p:sp>
-      <p:sp>
-        <p:nvSpPr>
-          <p:cNvPr id="15" name="bonus"/>
+          <a:p>
+            <a:pPr indent="0" marL="0">
+              <a:buNone/>
+            </a:pPr>
+            <a:r>
+              <a:rPr lang="en-US" sz="1200" dirty="0">
+                <a:solidFill>
+                  <a:srgbClr val="E2E8F0"/>
+                </a:solidFill>
+              </a:rPr>
+              <a:t>tokenized bank deposits · licensed stablecoins · e-CNY-style rails</a:t>
+            </a:r>
+            <a:endParaRPr lang="en-US" sz="1500" dirty="0"/>
+          </a:p>
+        </p:txBody>
+      </p:sp>
+      <p:sp>
+        <p:nvSpPr>
+          <p:cNvPr id="17" name="Shape 15"/>
           <p:cNvSpPr/>
           <p:nvPr/>
         </p:nvSpPr>
         <p:spPr>
           <a:xfrm>
-            <a:off x="548640" y="5257800"/>
-            <a:ext cx="11064240" cy="914400"/>
-          </a:xfrm>
-          <a:prstGeom prst="roundRect">
-            <a:avLst>
-              <a:gd name="adj" fmla="val 12000"/>
-            </a:avLst>
+            <a:off x="8823960" y="2578608"/>
+            <a:ext cx="274320" cy="210312"/>
+          </a:xfrm>
+          <a:prstGeom prst="downArrow">
+            <a:avLst/>
           </a:prstGeom>
           <a:solidFill>
-            <a:srgbClr val="F1F5F9"/>
+            <a:srgbClr val="94A3B8"/>
           </a:solidFill>
           <a:ln w="12700">
             <a:solidFill>
-              <a:srgbClr val="E2E8F0"/>
+              <a:srgbClr val="94A3B8"/>
             </a:solidFill>
             <a:prstDash val="solid"/>
           </a:ln>
-          <a:effectLst>
-            <a:outerShdw sx="100000" sy="100000" kx="0" ky="0" algn="bl" rotWithShape="0" blurRad="76200" dist="25400" dir="5400000">
-              <a:srgbClr val="94A3B8">
-                <a:alpha val="25000"/>
-              </a:srgbClr>
-            </a:outerShdw>
-          </a:effectLst>
-        </p:spPr>
-        <p:txBody>
-          <a:bodyPr/>
-          <a:p/>
-        </p:txBody>
-      </p:sp>
-      <p:sp>
-        <p:nvSpPr>
-          <p:cNvPr id="16" name="Text 14"/>
+        </p:spPr>
+      </p:sp>
+      <p:sp>
+        <p:nvSpPr>
+          <p:cNvPr id="18" name="Shape 16"/>
+          <p:cNvSpPr/>
+          <p:nvPr/>
+        </p:nvSpPr>
+        <p:spPr>
+          <a:xfrm>
+            <a:off x="6309360" y="2807208"/>
+            <a:ext cx="5303520" cy="868680"/>
+          </a:xfrm>
+          <a:prstGeom prst="roundRect">
+            <a:avLst>
+              <a:gd name="adj" fmla="val 10526"/>
+            </a:avLst>
+          </a:prstGeom>
+          <a:solidFill>
+            <a:srgbClr val="0F766E"/>
+          </a:solidFill>
+          <a:ln w="12700">
+            <a:solidFill>
+              <a:srgbClr val="0F766E"/>
+            </a:solidFill>
+            <a:prstDash val="solid"/>
+          </a:ln>
+        </p:spPr>
+      </p:sp>
+      <p:sp>
+        <p:nvSpPr>
+          <p:cNvPr id="19" name="Text 17"/>
           <p:cNvSpPr txBox="1"/>
           <p:nvPr/>
         </p:nvSpPr>
         <p:spPr>
           <a:xfrm>
-            <a:off x="822960" y="5349240"/>
-            <a:ext cx="10515600" cy="731520"/>
+            <a:off x="6492240" y="2898648"/>
+            <a:ext cx="4937760" cy="713232"/>
           </a:xfrm>
           <a:prstGeom prst="rect">
             <a:avLst/>
@@ -5424,21 +5440,228 @@
             <a:r>
               <a:rPr lang="en-US" sz="1500" b="1" dirty="0">
                 <a:solidFill>
-                  <a:srgbClr val="0F766E"/>
-                </a:solidFill>
-              </a:rPr>
-              <a:t>On-chain challenge bonus:  </a:t>
-            </a:r>
+                  <a:srgbClr val="FFFFFF"/>
+                </a:solidFill>
+              </a:rPr>
+              <a:t>Permissioned EVM chain</a:t>
+            </a:r>
+            <a:endParaRPr lang="en-US" sz="1500" dirty="0"/>
+          </a:p>
+          <a:p>
             <a:pPr indent="0" marL="0">
               <a:buNone/>
             </a:pPr>
             <a:r>
-              <a:rPr lang="en-US" sz="1500" dirty="0">
-                <a:solidFill>
-                  <a:srgbClr val="0F172A"/>
-                </a:solidFill>
-              </a:rPr>
-              <a:t>custom policy vault + ERC-4626 treasury + on-chain decision anchoring + a stolen-key transaction reverted on a public testnet</a:t>
+              <a:rPr lang="en-US" sz="1200" dirty="0">
+                <a:solidFill>
+                  <a:srgbClr val="E2E8F0"/>
+                </a:solidFill>
+              </a:rPr>
+              <a:t>e.g. FISCO BCOS: WeBank's open-source, Solidity-compatible chain</a:t>
+            </a:r>
+            <a:endParaRPr lang="en-US" sz="1500" dirty="0"/>
+          </a:p>
+        </p:txBody>
+      </p:sp>
+      <p:sp>
+        <p:nvSpPr>
+          <p:cNvPr id="20" name="Shape 18"/>
+          <p:cNvSpPr/>
+          <p:nvPr/>
+        </p:nvSpPr>
+        <p:spPr>
+          <a:xfrm>
+            <a:off x="8823960" y="3694176"/>
+            <a:ext cx="274320" cy="210312"/>
+          </a:xfrm>
+          <a:prstGeom prst="downArrow">
+            <a:avLst/>
+          </a:prstGeom>
+          <a:solidFill>
+            <a:srgbClr val="94A3B8"/>
+          </a:solidFill>
+          <a:ln w="12700">
+            <a:solidFill>
+              <a:srgbClr val="94A3B8"/>
+            </a:solidFill>
+            <a:prstDash val="solid"/>
+          </a:ln>
+        </p:spPr>
+      </p:sp>
+      <p:sp>
+        <p:nvSpPr>
+          <p:cNvPr id="21" name="Shape 19"/>
+          <p:cNvSpPr/>
+          <p:nvPr/>
+        </p:nvSpPr>
+        <p:spPr>
+          <a:xfrm>
+            <a:off x="6309360" y="3922776"/>
+            <a:ext cx="5303520" cy="868680"/>
+          </a:xfrm>
+          <a:prstGeom prst="roundRect">
+            <a:avLst>
+              <a:gd name="adj" fmla="val 10526"/>
+            </a:avLst>
+          </a:prstGeom>
+          <a:solidFill>
+            <a:srgbClr val="B45309"/>
+          </a:solidFill>
+          <a:ln w="12700">
+            <a:solidFill>
+              <a:srgbClr val="B45309"/>
+            </a:solidFill>
+            <a:prstDash val="solid"/>
+          </a:ln>
+        </p:spPr>
+      </p:sp>
+      <p:sp>
+        <p:nvSpPr>
+          <p:cNvPr id="22" name="Text 20"/>
+          <p:cNvSpPr txBox="1"/>
+          <p:nvPr/>
+        </p:nvSpPr>
+        <p:spPr>
+          <a:xfrm>
+            <a:off x="6492240" y="4014216"/>
+            <a:ext cx="4937760" cy="713232"/>
+          </a:xfrm>
+          <a:prstGeom prst="rect">
+            <a:avLst/>
+          </a:prstGeom>
+          <a:noFill/>
+          <a:ln/>
+        </p:spPr>
+        <p:txBody>
+          <a:bodyPr wrap="square" lIns="0" tIns="0" rIns="0" bIns="0" rtlCol="0" anchor="ctr"/>
+          <a:lstStyle/>
+          <a:p>
+            <a:pPr indent="0" marL="0">
+              <a:buNone/>
+            </a:pPr>
+            <a:r>
+              <a:rPr lang="en-US" sz="1500" b="1" dirty="0">
+                <a:solidFill>
+                  <a:srgbClr val="FFFFFF"/>
+                </a:solidFill>
+              </a:rPr>
+              <a:t>Same contracts</a:t>
+            </a:r>
+            <a:endParaRPr lang="en-US" sz="1500" dirty="0"/>
+          </a:p>
+          <a:p>
+            <a:pPr indent="0" marL="0">
+              <a:buNone/>
+            </a:pPr>
+            <a:r>
+              <a:rPr lang="en-US" sz="1200" dirty="0">
+                <a:solidFill>
+                  <a:srgbClr val="E2E8F0"/>
+                </a:solidFill>
+              </a:rPr>
+              <a:t>plain Solidity + OpenZeppelin, no Ethereum-only features: recompile, redeploy</a:t>
+            </a:r>
+            <a:endParaRPr lang="en-US" sz="1500" dirty="0"/>
+          </a:p>
+        </p:txBody>
+      </p:sp>
+      <p:sp>
+        <p:nvSpPr>
+          <p:cNvPr id="23" name="Shape 21"/>
+          <p:cNvSpPr/>
+          <p:nvPr/>
+        </p:nvSpPr>
+        <p:spPr>
+          <a:xfrm>
+            <a:off x="8823960" y="4809744"/>
+            <a:ext cx="274320" cy="210312"/>
+          </a:xfrm>
+          <a:prstGeom prst="downArrow">
+            <a:avLst/>
+          </a:prstGeom>
+          <a:solidFill>
+            <a:srgbClr val="94A3B8"/>
+          </a:solidFill>
+          <a:ln w="12700">
+            <a:solidFill>
+              <a:srgbClr val="94A3B8"/>
+            </a:solidFill>
+            <a:prstDash val="solid"/>
+          </a:ln>
+        </p:spPr>
+      </p:sp>
+      <p:sp>
+        <p:nvSpPr>
+          <p:cNvPr id="24" name="Shape 22"/>
+          <p:cNvSpPr/>
+          <p:nvPr/>
+        </p:nvSpPr>
+        <p:spPr>
+          <a:xfrm>
+            <a:off x="6309360" y="5038344"/>
+            <a:ext cx="5303520" cy="868680"/>
+          </a:xfrm>
+          <a:prstGeom prst="roundRect">
+            <a:avLst>
+              <a:gd name="adj" fmla="val 10526"/>
+            </a:avLst>
+          </a:prstGeom>
+          <a:solidFill>
+            <a:srgbClr val="0F172A"/>
+          </a:solidFill>
+          <a:ln w="12700">
+            <a:solidFill>
+              <a:srgbClr val="0F172A"/>
+            </a:solidFill>
+            <a:prstDash val="solid"/>
+          </a:ln>
+        </p:spPr>
+      </p:sp>
+      <p:sp>
+        <p:nvSpPr>
+          <p:cNvPr id="25" name="Text 23"/>
+          <p:cNvSpPr txBox="1"/>
+          <p:nvPr/>
+        </p:nvSpPr>
+        <p:spPr>
+          <a:xfrm>
+            <a:off x="6492240" y="5129784"/>
+            <a:ext cx="4937760" cy="713232"/>
+          </a:xfrm>
+          <a:prstGeom prst="rect">
+            <a:avLst/>
+          </a:prstGeom>
+          <a:noFill/>
+          <a:ln/>
+        </p:spPr>
+        <p:txBody>
+          <a:bodyPr wrap="square" lIns="0" tIns="0" rIns="0" bIns="0" rtlCol="0" anchor="ctr"/>
+          <a:lstStyle/>
+          <a:p>
+            <a:pPr indent="0" marL="0">
+              <a:buNone/>
+            </a:pPr>
+            <a:r>
+              <a:rPr lang="en-US" sz="1500" b="1" dirty="0">
+                <a:solidFill>
+                  <a:srgbClr val="FFFFFF"/>
+                </a:solidFill>
+              </a:rPr>
+              <a:t>Same agent</a:t>
+            </a:r>
+            <a:endParaRPr lang="en-US" sz="1500" dirty="0"/>
+          </a:p>
+          <a:p>
+            <a:pPr indent="0" marL="0">
+              <a:buNone/>
+            </a:pPr>
+            <a:r>
+              <a:rPr lang="en-US" sz="1200" dirty="0">
+                <a:solidFill>
+                  <a:srgbClr val="E2E8F0"/>
+                </a:solidFill>
+              </a:rPr>
+              <a:t>chain-agnostic: it needs an RPC endpoint and an ABI, nothing else</a:t>
             </a:r>
             <a:endParaRPr lang="en-US" sz="1500" dirty="0"/>
           </a:p>
@@ -5524,6 +5747,714 @@
         </p:nvSpPr>
         <p:spPr>
           <a:xfrm>
+            <a:off x="548640" y="274320"/>
+            <a:ext cx="11064240" cy="1188720"/>
+          </a:xfrm>
+          <a:prstGeom prst="rect">
+            <a:avLst/>
+          </a:prstGeom>
+          <a:noFill/>
+          <a:ln/>
+        </p:spPr>
+        <p:txBody>
+          <a:bodyPr wrap="square" lIns="0" tIns="0" rIns="0" bIns="0" rtlCol="0" anchor="ctr"/>
+          <a:lstStyle/>
+          <a:p>
+            <a:pPr indent="0" marL="0">
+              <a:buNone/>
+            </a:pPr>
+            <a:r>
+              <a:rPr lang="en-US" sz="3400" b="1" dirty="0">
+                <a:solidFill>
+                  <a:schemeClr val="tx1"/>
+                </a:solidFill>
+              </a:rPr>
+              <a:t>Mapped to the judging criteria</a:t>
+            </a:r>
+            <a:endParaRPr lang="en-US" sz="3400" dirty="0"/>
+          </a:p>
+        </p:txBody>
+      </p:sp>
+      <p:sp>
+        <p:nvSpPr>
+          <p:cNvPr id="3" name="crit0"/>
+          <p:cNvSpPr/>
+          <p:nvPr/>
+        </p:nvSpPr>
+        <p:spPr>
+          <a:xfrm>
+            <a:off x="548640" y="1691640"/>
+            <a:ext cx="3520440" cy="3337560"/>
+          </a:xfrm>
+          <a:prstGeom prst="roundRect">
+            <a:avLst>
+              <a:gd name="adj" fmla="val 3288"/>
+            </a:avLst>
+          </a:prstGeom>
+          <a:solidFill>
+            <a:srgbClr val="FFFFFF"/>
+          </a:solidFill>
+          <a:ln w="12700">
+            <a:solidFill>
+              <a:srgbClr val="E2E8F0"/>
+            </a:solidFill>
+            <a:prstDash val="solid"/>
+          </a:ln>
+          <a:effectLst>
+            <a:outerShdw sx="100000" sy="100000" kx="0" ky="0" algn="bl" rotWithShape="0" blurRad="76200" dist="25400" dir="5400000">
+              <a:srgbClr val="94A3B8">
+                <a:alpha val="25000"/>
+              </a:srgbClr>
+            </a:outerShdw>
+          </a:effectLst>
+        </p:spPr>
+      </p:sp>
+      <p:sp>
+        <p:nvSpPr>
+          <p:cNvPr id="4" name="Shape 2"/>
+          <p:cNvSpPr/>
+          <p:nvPr/>
+        </p:nvSpPr>
+        <p:spPr>
+          <a:xfrm>
+            <a:off x="777240" y="1874520"/>
+            <a:ext cx="3063240" cy="548640"/>
+          </a:xfrm>
+          <a:prstGeom prst="roundRect">
+            <a:avLst>
+              <a:gd name="adj" fmla="val 13333"/>
+            </a:avLst>
+          </a:prstGeom>
+          <a:solidFill>
+            <a:srgbClr val="0F766E"/>
+          </a:solidFill>
+          <a:ln w="12700">
+            <a:solidFill>
+              <a:srgbClr val="0F766E"/>
+            </a:solidFill>
+            <a:prstDash val="solid"/>
+          </a:ln>
+        </p:spPr>
+      </p:sp>
+      <p:sp>
+        <p:nvSpPr>
+          <p:cNvPr id="5" name="Text 3"/>
+          <p:cNvSpPr txBox="1"/>
+          <p:nvPr/>
+        </p:nvSpPr>
+        <p:spPr>
+          <a:xfrm>
+            <a:off x="777240" y="1874520"/>
+            <a:ext cx="3063240" cy="548640"/>
+          </a:xfrm>
+          <a:prstGeom prst="rect">
+            <a:avLst/>
+          </a:prstGeom>
+          <a:noFill/>
+          <a:ln/>
+        </p:spPr>
+        <p:txBody>
+          <a:bodyPr wrap="square" lIns="0" tIns="0" rIns="0" bIns="0" rtlCol="0" anchor="ctr"/>
+          <a:lstStyle/>
+          <a:p>
+            <a:pPr algn="ctr" indent="0" marL="0">
+              <a:buNone/>
+            </a:pPr>
+            <a:r>
+              <a:rPr lang="en-US" sz="1500" b="1" dirty="0">
+                <a:solidFill>
+                  <a:srgbClr val="FFFFFF"/>
+                </a:solidFill>
+              </a:rPr>
+              <a:t>Task completion · 40%</a:t>
+            </a:r>
+            <a:endParaRPr lang="en-US" sz="1500" dirty="0"/>
+          </a:p>
+        </p:txBody>
+      </p:sp>
+      <p:sp>
+        <p:nvSpPr>
+          <p:cNvPr id="6" name="Text 4"/>
+          <p:cNvSpPr txBox="1"/>
+          <p:nvPr/>
+        </p:nvSpPr>
+        <p:spPr>
+          <a:xfrm>
+            <a:off x="822960" y="2606040"/>
+            <a:ext cx="3017520" cy="2331720"/>
+          </a:xfrm>
+          <a:prstGeom prst="rect">
+            <a:avLst/>
+          </a:prstGeom>
+          <a:noFill/>
+          <a:ln/>
+        </p:spPr>
+        <p:txBody>
+          <a:bodyPr wrap="square" lIns="0" tIns="0" rIns="0" bIns="0" rtlCol="0" anchor="t"/>
+          <a:lstStyle/>
+          <a:p>
+            <a:pPr marL="342900" indent="-342900">
+              <a:spcAft>
+                <a:spcPts val="800"/>
+              </a:spcAft>
+              <a:buSzPct val="100000"/>
+              <a:buChar char="•"/>
+            </a:pPr>
+            <a:r>
+              <a:rPr lang="en-US" sz="1400" dirty="0">
+                <a:solidFill>
+                  <a:srgbClr val="334155"/>
+                </a:solidFill>
+              </a:rPr>
+              <a:t>22/22 legitimate tasks completed end-to-end with real transactions</a:t>
+            </a:r>
+            <a:endParaRPr lang="en-US" sz="1400" dirty="0"/>
+          </a:p>
+          <a:p>
+            <a:pPr marL="342900" indent="-342900">
+              <a:spcAft>
+                <a:spcPts val="800"/>
+              </a:spcAft>
+              <a:buSzPct val="100000"/>
+              <a:buChar char="•"/>
+            </a:pPr>
+            <a:r>
+              <a:rPr lang="en-US" sz="1400" dirty="0">
+                <a:solidFill>
+                  <a:srgbClr val="334155"/>
+                </a:solidFill>
+              </a:rPr>
+              <a:t>Invoices in EN/ID, text and PDF; maker-checker; recurring; treasury; chat</a:t>
+            </a:r>
+            <a:endParaRPr lang="en-US" sz="1400" dirty="0"/>
+          </a:p>
+          <a:p>
+            <a:pPr marL="342900" indent="-342900">
+              <a:spcAft>
+                <a:spcPts val="800"/>
+              </a:spcAft>
+              <a:buSzPct val="100000"/>
+              <a:buChar char="•"/>
+            </a:pPr>
+            <a:r>
+              <a:rPr lang="en-US" sz="1400" dirty="0">
+                <a:solidFill>
+                  <a:srgbClr val="334155"/>
+                </a:solidFill>
+              </a:rPr>
+              <a:t>Public-testnet execution log with transaction hashes</a:t>
+            </a:r>
+            <a:endParaRPr lang="en-US" sz="1400" dirty="0"/>
+          </a:p>
+        </p:txBody>
+      </p:sp>
+      <p:sp>
+        <p:nvSpPr>
+          <p:cNvPr id="7" name="crit1"/>
+          <p:cNvSpPr/>
+          <p:nvPr/>
+        </p:nvSpPr>
+        <p:spPr>
+          <a:xfrm>
+            <a:off x="4297680" y="1691640"/>
+            <a:ext cx="3520440" cy="3337560"/>
+          </a:xfrm>
+          <a:prstGeom prst="roundRect">
+            <a:avLst>
+              <a:gd name="adj" fmla="val 3288"/>
+            </a:avLst>
+          </a:prstGeom>
+          <a:solidFill>
+            <a:srgbClr val="FFFFFF"/>
+          </a:solidFill>
+          <a:ln w="12700">
+            <a:solidFill>
+              <a:srgbClr val="E2E8F0"/>
+            </a:solidFill>
+            <a:prstDash val="solid"/>
+          </a:ln>
+          <a:effectLst>
+            <a:outerShdw sx="100000" sy="100000" kx="0" ky="0" algn="bl" rotWithShape="0" blurRad="76200" dist="25400" dir="5400000">
+              <a:srgbClr val="94A3B8">
+                <a:alpha val="25000"/>
+              </a:srgbClr>
+            </a:outerShdw>
+          </a:effectLst>
+        </p:spPr>
+      </p:sp>
+      <p:sp>
+        <p:nvSpPr>
+          <p:cNvPr id="8" name="Shape 6"/>
+          <p:cNvSpPr/>
+          <p:nvPr/>
+        </p:nvSpPr>
+        <p:spPr>
+          <a:xfrm>
+            <a:off x="4526280" y="1874520"/>
+            <a:ext cx="3063240" cy="548640"/>
+          </a:xfrm>
+          <a:prstGeom prst="roundRect">
+            <a:avLst>
+              <a:gd name="adj" fmla="val 13333"/>
+            </a:avLst>
+          </a:prstGeom>
+          <a:solidFill>
+            <a:srgbClr val="B91C1C"/>
+          </a:solidFill>
+          <a:ln w="12700">
+            <a:solidFill>
+              <a:srgbClr val="B91C1C"/>
+            </a:solidFill>
+            <a:prstDash val="solid"/>
+          </a:ln>
+        </p:spPr>
+      </p:sp>
+      <p:sp>
+        <p:nvSpPr>
+          <p:cNvPr id="9" name="Text 7"/>
+          <p:cNvSpPr txBox="1"/>
+          <p:nvPr/>
+        </p:nvSpPr>
+        <p:spPr>
+          <a:xfrm>
+            <a:off x="4526280" y="1874520"/>
+            <a:ext cx="3063240" cy="548640"/>
+          </a:xfrm>
+          <a:prstGeom prst="rect">
+            <a:avLst/>
+          </a:prstGeom>
+          <a:noFill/>
+          <a:ln/>
+        </p:spPr>
+        <p:txBody>
+          <a:bodyPr wrap="square" lIns="0" tIns="0" rIns="0" bIns="0" rtlCol="0" anchor="ctr"/>
+          <a:lstStyle/>
+          <a:p>
+            <a:pPr algn="ctr" indent="0" marL="0">
+              <a:buNone/>
+            </a:pPr>
+            <a:r>
+              <a:rPr lang="en-US" sz="1500" b="1" dirty="0">
+                <a:solidFill>
+                  <a:srgbClr val="FFFFFF"/>
+                </a:solidFill>
+              </a:rPr>
+              <a:t>Security &amp; compliance · 30%</a:t>
+            </a:r>
+            <a:endParaRPr lang="en-US" sz="1500" dirty="0"/>
+          </a:p>
+        </p:txBody>
+      </p:sp>
+      <p:sp>
+        <p:nvSpPr>
+          <p:cNvPr id="10" name="Text 8"/>
+          <p:cNvSpPr txBox="1"/>
+          <p:nvPr/>
+        </p:nvSpPr>
+        <p:spPr>
+          <a:xfrm>
+            <a:off x="4572000" y="2606040"/>
+            <a:ext cx="3017520" cy="2331720"/>
+          </a:xfrm>
+          <a:prstGeom prst="rect">
+            <a:avLst/>
+          </a:prstGeom>
+          <a:noFill/>
+          <a:ln/>
+        </p:spPr>
+        <p:txBody>
+          <a:bodyPr wrap="square" lIns="0" tIns="0" rIns="0" bIns="0" rtlCol="0" anchor="t"/>
+          <a:lstStyle/>
+          <a:p>
+            <a:pPr marL="342900" indent="-342900">
+              <a:spcAft>
+                <a:spcPts val="800"/>
+              </a:spcAft>
+              <a:buSzPct val="100000"/>
+              <a:buChar char="•"/>
+            </a:pPr>
+            <a:r>
+              <a:rPr lang="en-US" sz="1400" dirty="0">
+                <a:solidFill>
+                  <a:srgbClr val="334155"/>
+                </a:solidFill>
+              </a:rPr>
+              <a:t>Three independent layers; four permission tiers enforced on-chain</a:t>
+            </a:r>
+            <a:endParaRPr lang="en-US" sz="1400" dirty="0"/>
+          </a:p>
+          <a:p>
+            <a:pPr marL="342900" indent="-342900">
+              <a:spcAft>
+                <a:spcPts val="800"/>
+              </a:spcAft>
+              <a:buSzPct val="100000"/>
+              <a:buChar char="•"/>
+            </a:pPr>
+            <a:r>
+              <a:rPr lang="en-US" sz="1400" dirty="0">
+                <a:solidFill>
+                  <a:srgbClr val="334155"/>
+                </a:solidFill>
+              </a:rPr>
+              <a:t>35/35 attacks stopped, including a stolen agent key</a:t>
+            </a:r>
+            <a:endParaRPr lang="en-US" sz="1400" dirty="0"/>
+          </a:p>
+          <a:p>
+            <a:pPr marL="342900" indent="-342900">
+              <a:spcAft>
+                <a:spcPts val="800"/>
+              </a:spcAft>
+              <a:buSzPct val="100000"/>
+              <a:buChar char="•"/>
+            </a:pPr>
+            <a:r>
+              <a:rPr lang="en-US" sz="1400" dirty="0">
+                <a:solidFill>
+                  <a:srgbClr val="334155"/>
+                </a:solidFill>
+              </a:rPr>
+              <a:t>Fuzz-proven invariants; honest risk register in the self-assessment</a:t>
+            </a:r>
+            <a:endParaRPr lang="en-US" sz="1400" dirty="0"/>
+          </a:p>
+        </p:txBody>
+      </p:sp>
+      <p:sp>
+        <p:nvSpPr>
+          <p:cNvPr id="11" name="crit2"/>
+          <p:cNvSpPr/>
+          <p:nvPr/>
+        </p:nvSpPr>
+        <p:spPr>
+          <a:xfrm>
+            <a:off x="8046720" y="1691640"/>
+            <a:ext cx="3520440" cy="3337560"/>
+          </a:xfrm>
+          <a:prstGeom prst="roundRect">
+            <a:avLst>
+              <a:gd name="adj" fmla="val 3288"/>
+            </a:avLst>
+          </a:prstGeom>
+          <a:solidFill>
+            <a:srgbClr val="FFFFFF"/>
+          </a:solidFill>
+          <a:ln w="12700">
+            <a:solidFill>
+              <a:srgbClr val="E2E8F0"/>
+            </a:solidFill>
+            <a:prstDash val="solid"/>
+          </a:ln>
+          <a:effectLst>
+            <a:outerShdw sx="100000" sy="100000" kx="0" ky="0" algn="bl" rotWithShape="0" blurRad="76200" dist="25400" dir="5400000">
+              <a:srgbClr val="94A3B8">
+                <a:alpha val="25000"/>
+              </a:srgbClr>
+            </a:outerShdw>
+          </a:effectLst>
+        </p:spPr>
+      </p:sp>
+      <p:sp>
+        <p:nvSpPr>
+          <p:cNvPr id="12" name="Shape 10"/>
+          <p:cNvSpPr/>
+          <p:nvPr/>
+        </p:nvSpPr>
+        <p:spPr>
+          <a:xfrm>
+            <a:off x="8275320" y="1874520"/>
+            <a:ext cx="3063240" cy="548640"/>
+          </a:xfrm>
+          <a:prstGeom prst="roundRect">
+            <a:avLst>
+              <a:gd name="adj" fmla="val 13333"/>
+            </a:avLst>
+          </a:prstGeom>
+          <a:solidFill>
+            <a:srgbClr val="1D4ED8"/>
+          </a:solidFill>
+          <a:ln w="12700">
+            <a:solidFill>
+              <a:srgbClr val="1D4ED8"/>
+            </a:solidFill>
+            <a:prstDash val="solid"/>
+          </a:ln>
+        </p:spPr>
+      </p:sp>
+      <p:sp>
+        <p:nvSpPr>
+          <p:cNvPr id="13" name="Text 11"/>
+          <p:cNvSpPr txBox="1"/>
+          <p:nvPr/>
+        </p:nvSpPr>
+        <p:spPr>
+          <a:xfrm>
+            <a:off x="8275320" y="1874520"/>
+            <a:ext cx="3063240" cy="548640"/>
+          </a:xfrm>
+          <a:prstGeom prst="rect">
+            <a:avLst/>
+          </a:prstGeom>
+          <a:noFill/>
+          <a:ln/>
+        </p:spPr>
+        <p:txBody>
+          <a:bodyPr wrap="square" lIns="0" tIns="0" rIns="0" bIns="0" rtlCol="0" anchor="ctr"/>
+          <a:lstStyle/>
+          <a:p>
+            <a:pPr algn="ctr" indent="0" marL="0">
+              <a:buNone/>
+            </a:pPr>
+            <a:r>
+              <a:rPr lang="en-US" sz="1500" b="1" dirty="0">
+                <a:solidFill>
+                  <a:srgbClr val="FFFFFF"/>
+                </a:solidFill>
+              </a:rPr>
+              <a:t>Innovation &amp; interaction · 30%</a:t>
+            </a:r>
+            <a:endParaRPr lang="en-US" sz="1500" dirty="0"/>
+          </a:p>
+        </p:txBody>
+      </p:sp>
+      <p:sp>
+        <p:nvSpPr>
+          <p:cNvPr id="14" name="Text 12"/>
+          <p:cNvSpPr txBox="1"/>
+          <p:nvPr/>
+        </p:nvSpPr>
+        <p:spPr>
+          <a:xfrm>
+            <a:off x="8321040" y="2606040"/>
+            <a:ext cx="3017520" cy="2331720"/>
+          </a:xfrm>
+          <a:prstGeom prst="rect">
+            <a:avLst/>
+          </a:prstGeom>
+          <a:noFill/>
+          <a:ln/>
+        </p:spPr>
+        <p:txBody>
+          <a:bodyPr wrap="square" lIns="0" tIns="0" rIns="0" bIns="0" rtlCol="0" anchor="t"/>
+          <a:lstStyle/>
+          <a:p>
+            <a:pPr marL="342900" indent="-342900">
+              <a:spcAft>
+                <a:spcPts val="800"/>
+              </a:spcAft>
+              <a:buSzPct val="100000"/>
+              <a:buChar char="•"/>
+            </a:pPr>
+            <a:r>
+              <a:rPr lang="en-US" sz="1400" dirty="0">
+                <a:solidFill>
+                  <a:srgbClr val="334155"/>
+                </a:solidFill>
+              </a:rPr>
+              <a:t>Decision hashes anchored on-chain: verifiable AI</a:t>
+            </a:r>
+            <a:endParaRPr lang="en-US" sz="1400" dirty="0"/>
+          </a:p>
+          <a:p>
+            <a:pPr marL="342900" indent="-342900">
+              <a:spcAft>
+                <a:spcPts val="800"/>
+              </a:spcAft>
+              <a:buSzPct val="100000"/>
+              <a:buChar char="•"/>
+            </a:pPr>
+            <a:r>
+              <a:rPr lang="en-US" sz="1400" dirty="0">
+                <a:solidFill>
+                  <a:srgbClr val="334155"/>
+                </a:solidFill>
+              </a:rPr>
+              <a:t>Bilingual chat for Indonesian SMEs; one-click red-team and audit</a:t>
+            </a:r>
+            <a:endParaRPr lang="en-US" sz="1400" dirty="0"/>
+          </a:p>
+          <a:p>
+            <a:pPr marL="342900" indent="-342900">
+              <a:spcAft>
+                <a:spcPts val="800"/>
+              </a:spcAft>
+              <a:buSzPct val="100000"/>
+              <a:buChar char="•"/>
+            </a:pPr>
+            <a:r>
+              <a:rPr lang="en-US" sz="1400" dirty="0">
+                <a:solidFill>
+                  <a:srgbClr val="334155"/>
+                </a:solidFill>
+              </a:rPr>
+              <a:t>Works with any OpenAI-compatible model, including DeepSeek and Qwen</a:t>
+            </a:r>
+            <a:endParaRPr lang="en-US" sz="1400" dirty="0"/>
+          </a:p>
+        </p:txBody>
+      </p:sp>
+      <p:sp>
+        <p:nvSpPr>
+          <p:cNvPr id="15" name="bonus"/>
+          <p:cNvSpPr/>
+          <p:nvPr/>
+        </p:nvSpPr>
+        <p:spPr>
+          <a:xfrm>
+            <a:off x="548640" y="5257800"/>
+            <a:ext cx="11064240" cy="914400"/>
+          </a:xfrm>
+          <a:prstGeom prst="roundRect">
+            <a:avLst>
+              <a:gd name="adj" fmla="val 12000"/>
+            </a:avLst>
+          </a:prstGeom>
+          <a:solidFill>
+            <a:srgbClr val="F1F5F9"/>
+          </a:solidFill>
+          <a:ln w="12700">
+            <a:solidFill>
+              <a:srgbClr val="E2E8F0"/>
+            </a:solidFill>
+            <a:prstDash val="solid"/>
+          </a:ln>
+          <a:effectLst>
+            <a:outerShdw sx="100000" sy="100000" kx="0" ky="0" algn="bl" rotWithShape="0" blurRad="76200" dist="25400" dir="5400000">
+              <a:srgbClr val="94A3B8">
+                <a:alpha val="25000"/>
+              </a:srgbClr>
+            </a:outerShdw>
+          </a:effectLst>
+        </p:spPr>
+      </p:sp>
+      <p:sp>
+        <p:nvSpPr>
+          <p:cNvPr id="16" name="Text 14"/>
+          <p:cNvSpPr txBox="1"/>
+          <p:nvPr/>
+        </p:nvSpPr>
+        <p:spPr>
+          <a:xfrm>
+            <a:off x="822960" y="5349240"/>
+            <a:ext cx="10515600" cy="731520"/>
+          </a:xfrm>
+          <a:prstGeom prst="rect">
+            <a:avLst/>
+          </a:prstGeom>
+          <a:noFill/>
+          <a:ln/>
+        </p:spPr>
+        <p:txBody>
+          <a:bodyPr wrap="square" lIns="0" tIns="0" rIns="0" bIns="0" rtlCol="0" anchor="ctr"/>
+          <a:lstStyle/>
+          <a:p>
+            <a:pPr indent="0" marL="0">
+              <a:buNone/>
+            </a:pPr>
+            <a:r>
+              <a:rPr lang="en-US" sz="1500" b="1" dirty="0">
+                <a:solidFill>
+                  <a:srgbClr val="0F766E"/>
+                </a:solidFill>
+              </a:rPr>
+              <a:t>On-chain challenge bonus:  </a:t>
+            </a:r>
+            <a:pPr indent="0" marL="0">
+              <a:buNone/>
+            </a:pPr>
+            <a:r>
+              <a:rPr lang="en-US" sz="1500" dirty="0">
+                <a:solidFill>
+                  <a:srgbClr val="0F172A"/>
+                </a:solidFill>
+              </a:rPr>
+              <a:t>custom policy vault + ERC-4626 treasury + on-chain decision anchoring + a stolen-key transaction reverted on a public testnet</a:t>
+            </a:r>
+            <a:endParaRPr lang="en-US" sz="1500" dirty="0"/>
+          </a:p>
+        </p:txBody>
+      </p:sp>
+      <p:sp>
+        <p:nvSpPr>
+          <p:cNvPr id="25" name="Slide Number Placeholder 0"/>
+          <p:cNvSpPr>
+            <a:spLocks noGrp="1"/>
+          </p:cNvSpPr>
+          <p:nvPr>
+            <p:ph type="sldNum" sz="quarter" idx="4294967295"/>
+          </p:nvPr>
+        </p:nvSpPr>
+        <p:spPr>
+          <a:xfrm>
+            <a:off x="11247120" y="6400800"/>
+            <a:ext cx="457200" cy="274320"/>
+          </a:xfrm>
+          <a:prstGeom prst="rect">
+            <a:avLst/>
+          </a:prstGeom>
+          <a:extLst>
+            <a:ext uri="{C572A759-6A51-4108-AA02-DFA0A04FC94B}">
+              <ma14:wrappingTextBoxFlag xmlns:ma14="http://schemas.microsoft.com/office/mac/drawingml/2011/main" val="0"/>
+            </a:ext>
+          </a:extLst>
+        </p:spPr>
+        <p:txBody>
+          <a:bodyPr/>
+          <a:lstStyle>
+            <a:lvl1pPr>
+              <a:defRPr sz="1000">
+                <a:solidFill>
+                  <a:srgbClr val="475569"/>
+                </a:solidFill>
+              </a:defRPr>
+            </a:lvl1pPr>
+          </a:lstStyle>
+          <a:p>
+            <a:pPr algn="l"/>
+            <a:fld id="{F7021451-1387-4CA6-816F-3879F97B5CBC}" type="slidenum">
+              <a:rPr b="0" lang="en-US"/>
+              <a:t>12</a:t>
+            </a:fld>
+            <a:endParaRPr lang="en-US"/>
+          </a:p>
+        </p:txBody>
+      </p:sp>
+    </p:spTree>
+  </p:cSld>
+  <p:clrMapOvr>
+    <a:masterClrMapping/>
+  </p:clrMapOvr>
+</p:sld>
+</file>
+
+<file path=ppt/slides/slide13.xml><?xml version="1.0" encoding="utf-8"?>
+<p:sld xmlns:a="http://schemas.openxmlformats.org/drawingml/2006/main" xmlns:r="http://schemas.openxmlformats.org/officeDocument/2006/relationships" xmlns:p="http://schemas.openxmlformats.org/presentationml/2006/main">
+  <p:cSld name="Slide 13">
+    <p:spTree>
+      <p:nvGrpSpPr>
+        <p:cNvPr id="1" name=""/>
+        <p:cNvGrpSpPr/>
+        <p:nvPr/>
+      </p:nvGrpSpPr>
+      <p:grpSpPr>
+        <a:xfrm>
+          <a:off x="0" y="0"/>
+          <a:ext cx="0" cy="0"/>
+          <a:chOff x="0" y="0"/>
+          <a:chExt cx="0" cy="0"/>
+        </a:xfrm>
+      </p:grpSpPr>
+      <p:sp>
+        <p:nvSpPr>
+          <p:cNvPr id="2" name="Text 0"/>
+          <p:cNvSpPr/>
+          <p:nvPr>
+            <p:ph idx="100" type="title" hasCustomPrompt="1"/>
+          </p:nvPr>
+        </p:nvSpPr>
+        <p:spPr>
+          <a:xfrm>
             <a:off x="731520" y="914400"/>
             <a:ext cx="10698480" cy="1097280"/>
           </a:xfrm>
@@ -5576,10 +6507,6 @@
             <a:prstDash val="solid"/>
           </a:ln>
         </p:spPr>
-        <p:txBody>
-          <a:bodyPr/>
-          <a:p/>
-        </p:txBody>
       </p:sp>
       <p:sp>
         <p:nvSpPr>
@@ -5688,10 +6615,6 @@
             <a:prstDash val="solid"/>
           </a:ln>
         </p:spPr>
-        <p:txBody>
-          <a:bodyPr/>
-          <a:p/>
-        </p:txBody>
       </p:sp>
       <p:sp>
         <p:nvSpPr>
@@ -5770,7 +6693,7 @@
                   <a:srgbClr val="CBD5E1"/>
                 </a:solidFill>
               </a:rPr>
-              <a:t>tokenized deposits or licensed stablecoins on permissioned EVM chains (e.g. FISCO BCOS)</a:t>
+              <a:t>regulated rails: tokenized deposits, licensed stablecoins, e-CNY-style rails</a:t>
             </a:r>
             <a:endParaRPr lang="en-US" sz="1800" dirty="0"/>
           </a:p>
@@ -5800,10 +6723,6 @@
             <a:prstDash val="solid"/>
           </a:ln>
         </p:spPr>
-        <p:txBody>
-          <a:bodyPr/>
-          <a:p/>
-        </p:txBody>
       </p:sp>
       <p:sp>
         <p:nvSpPr>
@@ -5954,7 +6873,7 @@
                   <a:srgbClr val="94A3B8"/>
                 </a:solidFill>
               </a:rPr>
-              <a:t>Code, evaluation and evidence: github.com/&lt;github-user&gt;/kendali</a:t>
+              <a:t>Code, evaluation and evidence: github.com/poggymacello/kendali</a:t>
             </a:r>
             <a:endParaRPr lang="en-US" sz="1400" dirty="0"/>
           </a:p>
@@ -6056,10 +6975,6 @@
             </a:outerShdw>
           </a:effectLst>
         </p:spPr>
-        <p:txBody>
-          <a:bodyPr/>
-          <a:p/>
-        </p:txBody>
       </p:sp>
       <p:sp>
         <p:nvSpPr>
@@ -6238,10 +7153,6 @@
             </a:outerShdw>
           </a:effectLst>
         </p:spPr>
-        <p:txBody>
-          <a:bodyPr/>
-          <a:p/>
-        </p:txBody>
       </p:sp>
       <p:sp>
         <p:nvSpPr>
@@ -6267,10 +7178,6 @@
             <a:prstDash val="solid"/>
           </a:ln>
         </p:spPr>
-        <p:txBody>
-          <a:bodyPr/>
-          <a:p/>
-        </p:txBody>
       </p:sp>
       <p:sp>
         <p:nvSpPr>
@@ -6413,10 +7320,6 @@
             </a:outerShdw>
           </a:effectLst>
         </p:spPr>
-        <p:txBody>
-          <a:bodyPr/>
-          <a:p/>
-        </p:txBody>
       </p:sp>
       <p:sp>
         <p:nvSpPr>
@@ -6442,10 +7345,6 @@
             <a:prstDash val="solid"/>
           </a:ln>
         </p:spPr>
-        <p:txBody>
-          <a:bodyPr/>
-          <a:p/>
-        </p:txBody>
       </p:sp>
       <p:sp>
         <p:nvSpPr>
@@ -6588,10 +7487,6 @@
             </a:outerShdw>
           </a:effectLst>
         </p:spPr>
-        <p:txBody>
-          <a:bodyPr/>
-          <a:p/>
-        </p:txBody>
       </p:sp>
       <p:sp>
         <p:nvSpPr>
@@ -6617,10 +7512,6 @@
             <a:prstDash val="solid"/>
           </a:ln>
         </p:spPr>
-        <p:txBody>
-          <a:bodyPr/>
-          <a:p/>
-        </p:txBody>
       </p:sp>
       <p:sp>
         <p:nvSpPr>
@@ -6840,7 +7731,7 @@
       </p:sp>
       <p:pic>
         <p:nvPicPr>
-          <p:cNvPr id="3" name="Image 0" descr="C:\Users\Ari Azis\FinTechathon2026\kendali\docs\img\architecture.png">    </p:cNvPr>
+          <p:cNvPr id="3" name="Image 0" descr="C:\Users\POGGY\Downloads\barengpoggy\FinTechathon2026\kendali\docs\img\architecture.png">    </p:cNvPr>
           <p:cNvPicPr>
             <a:picLocks noChangeAspect="1"/>
           </p:cNvPicPr>
@@ -7003,10 +7894,6 @@
             </a:outerShdw>
           </a:effectLst>
         </p:spPr>
-        <p:txBody>
-          <a:bodyPr/>
-          <a:p/>
-        </p:txBody>
       </p:sp>
       <p:sp>
         <p:nvSpPr>
@@ -7032,10 +7919,6 @@
             <a:prstDash val="solid"/>
           </a:ln>
         </p:spPr>
-        <p:txBody>
-          <a:bodyPr/>
-          <a:p/>
-        </p:txBody>
       </p:sp>
       <p:sp>
         <p:nvSpPr>
@@ -7214,10 +8097,6 @@
             </a:outerShdw>
           </a:effectLst>
         </p:spPr>
-        <p:txBody>
-          <a:bodyPr/>
-          <a:p/>
-        </p:txBody>
       </p:sp>
       <p:sp>
         <p:nvSpPr>
@@ -7243,10 +8122,6 @@
             <a:prstDash val="solid"/>
           </a:ln>
         </p:spPr>
-        <p:txBody>
-          <a:bodyPr/>
-          <a:p/>
-        </p:txBody>
       </p:sp>
       <p:sp>
         <p:nvSpPr>
@@ -7425,10 +8300,6 @@
             </a:outerShdw>
           </a:effectLst>
         </p:spPr>
-        <p:txBody>
-          <a:bodyPr/>
-          <a:p/>
-        </p:txBody>
       </p:sp>
       <p:sp>
         <p:nvSpPr>
@@ -7454,10 +8325,6 @@
             <a:prstDash val="solid"/>
           </a:ln>
         </p:spPr>
-        <p:txBody>
-          <a:bodyPr/>
-          <a:p/>
-        </p:txBody>
       </p:sp>
       <p:sp>
         <p:nvSpPr>
@@ -7636,10 +8503,6 @@
             </a:outerShdw>
           </a:effectLst>
         </p:spPr>
-        <p:txBody>
-          <a:bodyPr/>
-          <a:p/>
-        </p:txBody>
       </p:sp>
       <p:sp>
         <p:nvSpPr>
@@ -7665,10 +8528,6 @@
             <a:prstDash val="solid"/>
           </a:ln>
         </p:spPr>
-        <p:txBody>
-          <a:bodyPr/>
-          <a:p/>
-        </p:txBody>
       </p:sp>
       <p:sp>
         <p:nvSpPr>
@@ -7847,10 +8706,6 @@
             </a:outerShdw>
           </a:effectLst>
         </p:spPr>
-        <p:txBody>
-          <a:bodyPr/>
-          <a:p/>
-        </p:txBody>
       </p:sp>
       <p:sp>
         <p:nvSpPr>
@@ -7876,10 +8731,6 @@
             <a:prstDash val="solid"/>
           </a:ln>
         </p:spPr>
-        <p:txBody>
-          <a:bodyPr/>
-          <a:p/>
-        </p:txBody>
       </p:sp>
       <p:sp>
         <p:nvSpPr>
@@ -8058,10 +8909,6 @@
             </a:outerShdw>
           </a:effectLst>
         </p:spPr>
-        <p:txBody>
-          <a:bodyPr/>
-          <a:p/>
-        </p:txBody>
       </p:sp>
       <p:sp>
         <p:nvSpPr>
@@ -8087,10 +8934,6 @@
             <a:prstDash val="solid"/>
           </a:ln>
         </p:spPr>
-        <p:txBody>
-          <a:bodyPr/>
-          <a:p/>
-        </p:txBody>
       </p:sp>
       <p:sp>
         <p:nvSpPr>
@@ -8368,14 +9211,10 @@
             <a:prstDash val="solid"/>
           </a:ln>
         </p:spPr>
-        <p:txBody>
-          <a:bodyPr/>
-          <a:p/>
-        </p:txBody>
       </p:sp>
       <p:pic>
         <p:nvPicPr>
-          <p:cNvPr id="4" name="Image 0" descr="C:\Users\Ari Azis\FinTechathon2026\kendali\docs\img\ui-assistant.png">    </p:cNvPr>
+          <p:cNvPr id="4" name="Image 0" descr="C:\Users\POGGY\Downloads\barengpoggy\FinTechathon2026\kendali\docs\img\ui-assistant.png">    </p:cNvPr>
           <p:cNvPicPr>
             <a:picLocks noChangeAspect="1"/>
           </p:cNvPicPr>
@@ -8888,10 +9727,10 @@
             <a:tbl>
               <a:tblPr/>
               <a:tblGrid>
-                <a:gridCol w="3840480"/>
-                <a:gridCol w="4526280"/>
-                <a:gridCol w="1600200"/>
-                <a:gridCol w="1097280"/>
+                <a:gridCol w="3886200"/>
+                <a:gridCol w="3977640"/>
+                <a:gridCol w="1783080"/>
+                <a:gridCol w="1417320"/>
               </a:tblGrid>
               <a:tr h="402336">
                 <a:tc>
@@ -9185,7 +10024,7 @@
                           <a:ea typeface="Calibri" pitchFamily="34" charset="-122"/>
                           <a:cs typeface="Calibri" pitchFamily="34" charset="-120"/>
                         </a:rPr>
-                        <a:t>Business email compromise: new wallet + urgency</a:t>
+                        <a:t>Business email compromise: changed wallet</a:t>
                       </a:r>
                       <a:endParaRPr lang="en-US" sz="1300" dirty="0">
                         <a:latin typeface="Calibri" charset="0"/>
@@ -9253,7 +10092,7 @@
                           <a:ea typeface="Calibri" pitchFamily="34" charset="-122"/>
                           <a:cs typeface="Calibri" pitchFamily="34" charset="-120"/>
                         </a:rPr>
-                        <a:t>Payee bound to the KYB wallet; pressure language flagged</a:t>
+                        <a:t>KYB wallet binding; pressure language flagged</a:t>
                       </a:r>
                       <a:endParaRPr lang="en-US" sz="1300" dirty="0">
                         <a:latin typeface="Calibri" charset="0"/>
@@ -9389,7 +10228,281 @@
                           <a:ea typeface="Calibri" pitchFamily="34" charset="-122"/>
                           <a:cs typeface="Calibri" pitchFamily="34" charset="-120"/>
                         </a:rPr>
-                        <a:t>A01</a:t>
+                        <a:t>A01 A24</a:t>
+                      </a:r>
+                      <a:endParaRPr lang="en-US" sz="1300" dirty="0">
+                        <a:latin typeface="Calibri" charset="0"/>
+                        <a:ea typeface="Calibri" charset="0"/>
+                        <a:cs typeface="Calibri" charset="0"/>
+                      </a:endParaRPr>
+                    </a:p>
+                  </a:txBody>
+                  <a:tcPr marL="91440" marR="91440" marT="45720" marB="45720" anchor="ctr">
+                    <a:lnL w="9525" cap="flat" cmpd="sng" algn="ctr">
+                      <a:solidFill>
+                        <a:srgbClr val="E2E8F0"/>
+                      </a:solidFill>
+                      <a:prstDash val="solid"/>
+                      <a:round/>
+                      <a:headEnd type="none" w="med" len="med"/>
+                      <a:tailEnd type="none" w="med" len="med"/>
+                    </a:lnL>
+                    <a:lnR w="9525" cap="flat" cmpd="sng" algn="ctr">
+                      <a:solidFill>
+                        <a:srgbClr val="E2E8F0"/>
+                      </a:solidFill>
+                      <a:prstDash val="solid"/>
+                      <a:round/>
+                      <a:headEnd type="none" w="med" len="med"/>
+                      <a:tailEnd type="none" w="med" len="med"/>
+                    </a:lnR>
+                    <a:lnT w="9525" cap="flat" cmpd="sng" algn="ctr">
+                      <a:solidFill>
+                        <a:srgbClr val="E2E8F0"/>
+                      </a:solidFill>
+                      <a:prstDash val="solid"/>
+                      <a:round/>
+                      <a:headEnd type="none" w="med" len="med"/>
+                      <a:tailEnd type="none" w="med" len="med"/>
+                    </a:lnT>
+                    <a:lnB w="9525" cap="flat" cmpd="sng" algn="ctr">
+                      <a:solidFill>
+                        <a:srgbClr val="E2E8F0"/>
+                      </a:solidFill>
+                      <a:prstDash val="solid"/>
+                      <a:round/>
+                      <a:headEnd type="none" w="med" len="med"/>
+                      <a:tailEnd type="none" w="med" len="med"/>
+                    </a:lnB>
+                    <a:solidFill>
+                      <a:srgbClr val="FFFFFF"/>
+                    </a:solidFill>
+                  </a:tcPr>
+                </a:tc>
+              </a:tr>
+              <a:tr h="402336">
+                <a:tc>
+                  <a:txBody>
+                    <a:bodyPr/>
+                    <a:lstStyle/>
+                    <a:p>
+                      <a:pPr indent="0" marL="0">
+                        <a:buNone/>
+                      </a:pPr>
+                      <a:r>
+                        <a:rPr lang="en-US" sz="1300" dirty="0">
+                          <a:solidFill>
+                            <a:srgbClr val="1E293B"/>
+                          </a:solidFill>
+                          <a:latin typeface="Calibri" pitchFamily="34" charset="0"/>
+                          <a:ea typeface="Calibri" pitchFamily="34" charset="-122"/>
+                          <a:cs typeface="Calibri" pitchFamily="34" charset="-120"/>
+                        </a:rPr>
+                        <a:t>Real vendor, goods never ordered, “pre-cleared”</a:t>
+                      </a:r>
+                      <a:endParaRPr lang="en-US" sz="1300" dirty="0">
+                        <a:latin typeface="Calibri" charset="0"/>
+                        <a:ea typeface="Calibri" charset="0"/>
+                        <a:cs typeface="Calibri" charset="0"/>
+                      </a:endParaRPr>
+                    </a:p>
+                  </a:txBody>
+                  <a:tcPr marL="91440" marR="91440" marT="45720" marB="45720" anchor="ctr">
+                    <a:lnL w="9525" cap="flat" cmpd="sng" algn="ctr">
+                      <a:solidFill>
+                        <a:srgbClr val="E2E8F0"/>
+                      </a:solidFill>
+                      <a:prstDash val="solid"/>
+                      <a:round/>
+                      <a:headEnd type="none" w="med" len="med"/>
+                      <a:tailEnd type="none" w="med" len="med"/>
+                    </a:lnL>
+                    <a:lnR w="9525" cap="flat" cmpd="sng" algn="ctr">
+                      <a:solidFill>
+                        <a:srgbClr val="E2E8F0"/>
+                      </a:solidFill>
+                      <a:prstDash val="solid"/>
+                      <a:round/>
+                      <a:headEnd type="none" w="med" len="med"/>
+                      <a:tailEnd type="none" w="med" len="med"/>
+                    </a:lnR>
+                    <a:lnT w="9525" cap="flat" cmpd="sng" algn="ctr">
+                      <a:solidFill>
+                        <a:srgbClr val="E2E8F0"/>
+                      </a:solidFill>
+                      <a:prstDash val="solid"/>
+                      <a:round/>
+                      <a:headEnd type="none" w="med" len="med"/>
+                      <a:tailEnd type="none" w="med" len="med"/>
+                    </a:lnT>
+                    <a:lnB w="9525" cap="flat" cmpd="sng" algn="ctr">
+                      <a:solidFill>
+                        <a:srgbClr val="E2E8F0"/>
+                      </a:solidFill>
+                      <a:prstDash val="solid"/>
+                      <a:round/>
+                      <a:headEnd type="none" w="med" len="med"/>
+                      <a:tailEnd type="none" w="med" len="med"/>
+                    </a:lnB>
+                    <a:solidFill>
+                      <a:srgbClr val="FFFFFF"/>
+                    </a:solidFill>
+                  </a:tcPr>
+                </a:tc>
+                <a:tc>
+                  <a:txBody>
+                    <a:bodyPr/>
+                    <a:lstStyle/>
+                    <a:p>
+                      <a:pPr indent="0" marL="0">
+                        <a:buNone/>
+                      </a:pPr>
+                      <a:r>
+                        <a:rPr lang="en-US" sz="1300" dirty="0">
+                          <a:solidFill>
+                            <a:srgbClr val="1E293B"/>
+                          </a:solidFill>
+                          <a:latin typeface="Calibri" pitchFamily="34" charset="0"/>
+                          <a:ea typeface="Calibri" pitchFamily="34" charset="-122"/>
+                          <a:cs typeface="Calibri" pitchFamily="34" charset="-120"/>
+                        </a:rPr>
+                        <a:t>Purchase-order match; approval claims flagged</a:t>
+                      </a:r>
+                      <a:endParaRPr lang="en-US" sz="1300" dirty="0">
+                        <a:latin typeface="Calibri" charset="0"/>
+                        <a:ea typeface="Calibri" charset="0"/>
+                        <a:cs typeface="Calibri" charset="0"/>
+                      </a:endParaRPr>
+                    </a:p>
+                  </a:txBody>
+                  <a:tcPr marL="91440" marR="91440" marT="45720" marB="45720" anchor="ctr">
+                    <a:lnL w="9525" cap="flat" cmpd="sng" algn="ctr">
+                      <a:solidFill>
+                        <a:srgbClr val="E2E8F0"/>
+                      </a:solidFill>
+                      <a:prstDash val="solid"/>
+                      <a:round/>
+                      <a:headEnd type="none" w="med" len="med"/>
+                      <a:tailEnd type="none" w="med" len="med"/>
+                    </a:lnL>
+                    <a:lnR w="9525" cap="flat" cmpd="sng" algn="ctr">
+                      <a:solidFill>
+                        <a:srgbClr val="E2E8F0"/>
+                      </a:solidFill>
+                      <a:prstDash val="solid"/>
+                      <a:round/>
+                      <a:headEnd type="none" w="med" len="med"/>
+                      <a:tailEnd type="none" w="med" len="med"/>
+                    </a:lnR>
+                    <a:lnT w="9525" cap="flat" cmpd="sng" algn="ctr">
+                      <a:solidFill>
+                        <a:srgbClr val="E2E8F0"/>
+                      </a:solidFill>
+                      <a:prstDash val="solid"/>
+                      <a:round/>
+                      <a:headEnd type="none" w="med" len="med"/>
+                      <a:tailEnd type="none" w="med" len="med"/>
+                    </a:lnT>
+                    <a:lnB w="9525" cap="flat" cmpd="sng" algn="ctr">
+                      <a:solidFill>
+                        <a:srgbClr val="E2E8F0"/>
+                      </a:solidFill>
+                      <a:prstDash val="solid"/>
+                      <a:round/>
+                      <a:headEnd type="none" w="med" len="med"/>
+                      <a:tailEnd type="none" w="med" len="med"/>
+                    </a:lnB>
+                    <a:solidFill>
+                      <a:srgbClr val="FFFFFF"/>
+                    </a:solidFill>
+                  </a:tcPr>
+                </a:tc>
+                <a:tc>
+                  <a:txBody>
+                    <a:bodyPr/>
+                    <a:lstStyle/>
+                    <a:p>
+                      <a:pPr indent="0" marL="0">
+                        <a:buNone/>
+                      </a:pPr>
+                      <a:r>
+                        <a:rPr lang="en-US" sz="1300" b="1" dirty="0">
+                          <a:solidFill>
+                            <a:srgbClr val="B45309"/>
+                          </a:solidFill>
+                          <a:latin typeface="Calibri" pitchFamily="34" charset="0"/>
+                          <a:ea typeface="Calibri" pitchFamily="34" charset="-122"/>
+                          <a:cs typeface="Calibri" pitchFamily="34" charset="-120"/>
+                        </a:rPr>
+                        <a:t>APPROVAL</a:t>
+                      </a:r>
+                      <a:endParaRPr lang="en-US" sz="1300" dirty="0">
+                        <a:latin typeface="Calibri" charset="0"/>
+                        <a:ea typeface="Calibri" charset="0"/>
+                        <a:cs typeface="Calibri" charset="0"/>
+                      </a:endParaRPr>
+                    </a:p>
+                  </a:txBody>
+                  <a:tcPr marL="91440" marR="91440" marT="45720" marB="45720" anchor="ctr">
+                    <a:lnL w="9525" cap="flat" cmpd="sng" algn="ctr">
+                      <a:solidFill>
+                        <a:srgbClr val="E2E8F0"/>
+                      </a:solidFill>
+                      <a:prstDash val="solid"/>
+                      <a:round/>
+                      <a:headEnd type="none" w="med" len="med"/>
+                      <a:tailEnd type="none" w="med" len="med"/>
+                    </a:lnL>
+                    <a:lnR w="9525" cap="flat" cmpd="sng" algn="ctr">
+                      <a:solidFill>
+                        <a:srgbClr val="E2E8F0"/>
+                      </a:solidFill>
+                      <a:prstDash val="solid"/>
+                      <a:round/>
+                      <a:headEnd type="none" w="med" len="med"/>
+                      <a:tailEnd type="none" w="med" len="med"/>
+                    </a:lnR>
+                    <a:lnT w="9525" cap="flat" cmpd="sng" algn="ctr">
+                      <a:solidFill>
+                        <a:srgbClr val="E2E8F0"/>
+                      </a:solidFill>
+                      <a:prstDash val="solid"/>
+                      <a:round/>
+                      <a:headEnd type="none" w="med" len="med"/>
+                      <a:tailEnd type="none" w="med" len="med"/>
+                    </a:lnT>
+                    <a:lnB w="9525" cap="flat" cmpd="sng" algn="ctr">
+                      <a:solidFill>
+                        <a:srgbClr val="E2E8F0"/>
+                      </a:solidFill>
+                      <a:prstDash val="solid"/>
+                      <a:round/>
+                      <a:headEnd type="none" w="med" len="med"/>
+                      <a:tailEnd type="none" w="med" len="med"/>
+                    </a:lnB>
+                    <a:solidFill>
+                      <a:srgbClr val="FFFFFF"/>
+                    </a:solidFill>
+                  </a:tcPr>
+                </a:tc>
+                <a:tc>
+                  <a:txBody>
+                    <a:bodyPr/>
+                    <a:lstStyle/>
+                    <a:p>
+                      <a:pPr indent="0" marL="0">
+                        <a:buNone/>
+                      </a:pPr>
+                      <a:r>
+                        <a:rPr lang="en-US" sz="1300" dirty="0">
+                          <a:solidFill>
+                            <a:srgbClr val="1E293B"/>
+                          </a:solidFill>
+                          <a:latin typeface="Calibri" pitchFamily="34" charset="0"/>
+                          <a:ea typeface="Calibri" pitchFamily="34" charset="-122"/>
+                          <a:cs typeface="Calibri" pitchFamily="34" charset="-120"/>
+                        </a:rPr>
+                        <a:t>A25–A27 A32 A33</a:t>
                       </a:r>
                       <a:endParaRPr lang="en-US" sz="1300" dirty="0">
                         <a:latin typeface="Calibri" charset="0"/>
@@ -9527,7 +10640,7 @@
                           <a:ea typeface="Calibri" pitchFamily="34" charset="-122"/>
                           <a:cs typeface="Calibri" pitchFamily="34" charset="-120"/>
                         </a:rPr>
-                        <a:t>Deterministic scanner + LLM second opinion; documents are data</a:t>
+                        <a:t>Deterministic scanner + LLM second opinion</a:t>
                       </a:r>
                       <a:endParaRPr lang="en-US" sz="1300" dirty="0">
                         <a:latin typeface="Calibri" charset="0"/>
@@ -10007,7 +11120,7 @@
                           <a:ea typeface="Calibri" pitchFamily="34" charset="-122"/>
                           <a:cs typeface="Calibri" pitchFamily="34" charset="-120"/>
                         </a:rPr>
-                        <a:t>Homoglyph vendor name</a:t>
+                        <a:t>Homoglyph or typo-squat vendor name</a:t>
                       </a:r>
                       <a:endParaRPr lang="en-US" sz="1300" dirty="0">
                         <a:latin typeface="Calibri" charset="0"/>
@@ -10075,7 +11188,7 @@
                           <a:ea typeface="Calibri" pitchFamily="34" charset="-122"/>
                           <a:cs typeface="Calibri" pitchFamily="34" charset="-120"/>
                         </a:rPr>
-                        <a:t>Confusable characters folded and flagged</a:t>
+                        <a:t>Confusables folded; name vs registration no.</a:t>
                       </a:r>
                       <a:endParaRPr lang="en-US" sz="1300" dirty="0">
                         <a:latin typeface="Calibri" charset="0"/>
@@ -10211,7 +11324,7 @@
                           <a:ea typeface="Calibri" pitchFamily="34" charset="-122"/>
                           <a:cs typeface="Calibri" pitchFamily="34" charset="-120"/>
                         </a:rPr>
-                        <a:t>A04</a:t>
+                        <a:t>A04 A31 A34</a:t>
                       </a:r>
                       <a:endParaRPr lang="en-US" sz="1300" dirty="0">
                         <a:latin typeface="Calibri" charset="0"/>
@@ -11103,7 +12216,7 @@
                           <a:ea typeface="Calibri" pitchFamily="34" charset="-122"/>
                           <a:cs typeface="Calibri" pitchFamily="34" charset="-120"/>
                         </a:rPr>
-                        <a:t>Chat: fake owner, raw address, raise limit, allowance</a:t>
+                        <a:t>Chat: fake owner, raw address, limits, “approve all”</a:t>
                       </a:r>
                       <a:endParaRPr lang="en-US" sz="1300" dirty="0">
                         <a:latin typeface="Calibri" charset="0"/>
@@ -11307,7 +12420,7 @@
                           <a:ea typeface="Calibri" pitchFamily="34" charset="-122"/>
                           <a:cs typeface="Calibri" pitchFamily="34" charset="-120"/>
                         </a:rPr>
-                        <a:t>A10–A13</a:t>
+                        <a:t>A10–A13 A30 A35</a:t>
                       </a:r>
                       <a:endParaRPr lang="en-US" sz="1300" dirty="0">
                         <a:latin typeface="Calibri" charset="0"/>
@@ -11633,280 +12746,6 @@
                   </a:tcPr>
                 </a:tc>
               </a:tr>
-              <a:tr h="402336">
-                <a:tc>
-                  <a:txBody>
-                    <a:bodyPr/>
-                    <a:lstStyle/>
-                    <a:p>
-                      <a:pPr indent="0" marL="0">
-                        <a:buNone/>
-                      </a:pPr>
-                      <a:r>
-                        <a:rPr lang="en-US" sz="1300" dirty="0">
-                          <a:solidFill>
-                            <a:srgbClr val="1E293B"/>
-                          </a:solidFill>
-                          <a:latin typeface="Calibri" pitchFamily="34" charset="0"/>
-                          <a:ea typeface="Calibri" pitchFamily="34" charset="-122"/>
-                          <a:cs typeface="Calibri" pitchFamily="34" charset="-120"/>
-                        </a:rPr>
-                        <a:t>Tampering with the local audit log</a:t>
-                      </a:r>
-                      <a:endParaRPr lang="en-US" sz="1300" dirty="0">
-                        <a:latin typeface="Calibri" charset="0"/>
-                        <a:ea typeface="Calibri" charset="0"/>
-                        <a:cs typeface="Calibri" charset="0"/>
-                      </a:endParaRPr>
-                    </a:p>
-                  </a:txBody>
-                  <a:tcPr marL="91440" marR="91440" marT="45720" marB="45720" anchor="ctr">
-                    <a:lnL w="9525" cap="flat" cmpd="sng" algn="ctr">
-                      <a:solidFill>
-                        <a:srgbClr val="E2E8F0"/>
-                      </a:solidFill>
-                      <a:prstDash val="solid"/>
-                      <a:round/>
-                      <a:headEnd type="none" w="med" len="med"/>
-                      <a:tailEnd type="none" w="med" len="med"/>
-                    </a:lnL>
-                    <a:lnR w="9525" cap="flat" cmpd="sng" algn="ctr">
-                      <a:solidFill>
-                        <a:srgbClr val="E2E8F0"/>
-                      </a:solidFill>
-                      <a:prstDash val="solid"/>
-                      <a:round/>
-                      <a:headEnd type="none" w="med" len="med"/>
-                      <a:tailEnd type="none" w="med" len="med"/>
-                    </a:lnR>
-                    <a:lnT w="9525" cap="flat" cmpd="sng" algn="ctr">
-                      <a:solidFill>
-                        <a:srgbClr val="E2E8F0"/>
-                      </a:solidFill>
-                      <a:prstDash val="solid"/>
-                      <a:round/>
-                      <a:headEnd type="none" w="med" len="med"/>
-                      <a:tailEnd type="none" w="med" len="med"/>
-                    </a:lnT>
-                    <a:lnB w="9525" cap="flat" cmpd="sng" algn="ctr">
-                      <a:solidFill>
-                        <a:srgbClr val="E2E8F0"/>
-                      </a:solidFill>
-                      <a:prstDash val="solid"/>
-                      <a:round/>
-                      <a:headEnd type="none" w="med" len="med"/>
-                      <a:tailEnd type="none" w="med" len="med"/>
-                    </a:lnB>
-                    <a:solidFill>
-                      <a:srgbClr val="FFFFFF"/>
-                    </a:solidFill>
-                  </a:tcPr>
-                </a:tc>
-                <a:tc>
-                  <a:txBody>
-                    <a:bodyPr/>
-                    <a:lstStyle/>
-                    <a:p>
-                      <a:pPr indent="0" marL="0">
-                        <a:buNone/>
-                      </a:pPr>
-                      <a:r>
-                        <a:rPr lang="en-US" sz="1300" dirty="0">
-                          <a:solidFill>
-                            <a:srgbClr val="1E293B"/>
-                          </a:solidFill>
-                          <a:latin typeface="Calibri" pitchFamily="34" charset="0"/>
-                          <a:ea typeface="Calibri" pitchFamily="34" charset="-122"/>
-                          <a:cs typeface="Calibri" pitchFamily="34" charset="-120"/>
-                        </a:rPr>
-                        <a:t>Hash chain + on-chain decision anchors</a:t>
-                      </a:r>
-                      <a:endParaRPr lang="en-US" sz="1300" dirty="0">
-                        <a:latin typeface="Calibri" charset="0"/>
-                        <a:ea typeface="Calibri" charset="0"/>
-                        <a:cs typeface="Calibri" charset="0"/>
-                      </a:endParaRPr>
-                    </a:p>
-                  </a:txBody>
-                  <a:tcPr marL="91440" marR="91440" marT="45720" marB="45720" anchor="ctr">
-                    <a:lnL w="9525" cap="flat" cmpd="sng" algn="ctr">
-                      <a:solidFill>
-                        <a:srgbClr val="E2E8F0"/>
-                      </a:solidFill>
-                      <a:prstDash val="solid"/>
-                      <a:round/>
-                      <a:headEnd type="none" w="med" len="med"/>
-                      <a:tailEnd type="none" w="med" len="med"/>
-                    </a:lnL>
-                    <a:lnR w="9525" cap="flat" cmpd="sng" algn="ctr">
-                      <a:solidFill>
-                        <a:srgbClr val="E2E8F0"/>
-                      </a:solidFill>
-                      <a:prstDash val="solid"/>
-                      <a:round/>
-                      <a:headEnd type="none" w="med" len="med"/>
-                      <a:tailEnd type="none" w="med" len="med"/>
-                    </a:lnR>
-                    <a:lnT w="9525" cap="flat" cmpd="sng" algn="ctr">
-                      <a:solidFill>
-                        <a:srgbClr val="E2E8F0"/>
-                      </a:solidFill>
-                      <a:prstDash val="solid"/>
-                      <a:round/>
-                      <a:headEnd type="none" w="med" len="med"/>
-                      <a:tailEnd type="none" w="med" len="med"/>
-                    </a:lnT>
-                    <a:lnB w="9525" cap="flat" cmpd="sng" algn="ctr">
-                      <a:solidFill>
-                        <a:srgbClr val="E2E8F0"/>
-                      </a:solidFill>
-                      <a:prstDash val="solid"/>
-                      <a:round/>
-                      <a:headEnd type="none" w="med" len="med"/>
-                      <a:tailEnd type="none" w="med" len="med"/>
-                    </a:lnB>
-                    <a:solidFill>
-                      <a:srgbClr val="FFFFFF"/>
-                    </a:solidFill>
-                  </a:tcPr>
-                </a:tc>
-                <a:tc>
-                  <a:txBody>
-                    <a:bodyPr/>
-                    <a:lstStyle/>
-                    <a:p>
-                      <a:pPr indent="0" marL="0">
-                        <a:buNone/>
-                      </a:pPr>
-                      <a:r>
-                        <a:rPr lang="en-US" sz="1300" b="1" dirty="0">
-                          <a:solidFill>
-                            <a:srgbClr val="0F766E"/>
-                          </a:solidFill>
-                          <a:latin typeface="Calibri" pitchFamily="34" charset="0"/>
-                          <a:ea typeface="Calibri" pitchFamily="34" charset="-122"/>
-                          <a:cs typeface="Calibri" pitchFamily="34" charset="-120"/>
-                        </a:rPr>
-                        <a:t>DETECTED</a:t>
-                      </a:r>
-                      <a:endParaRPr lang="en-US" sz="1300" dirty="0">
-                        <a:latin typeface="Calibri" charset="0"/>
-                        <a:ea typeface="Calibri" charset="0"/>
-                        <a:cs typeface="Calibri" charset="0"/>
-                      </a:endParaRPr>
-                    </a:p>
-                  </a:txBody>
-                  <a:tcPr marL="91440" marR="91440" marT="45720" marB="45720" anchor="ctr">
-                    <a:lnL w="9525" cap="flat" cmpd="sng" algn="ctr">
-                      <a:solidFill>
-                        <a:srgbClr val="E2E8F0"/>
-                      </a:solidFill>
-                      <a:prstDash val="solid"/>
-                      <a:round/>
-                      <a:headEnd type="none" w="med" len="med"/>
-                      <a:tailEnd type="none" w="med" len="med"/>
-                    </a:lnL>
-                    <a:lnR w="9525" cap="flat" cmpd="sng" algn="ctr">
-                      <a:solidFill>
-                        <a:srgbClr val="E2E8F0"/>
-                      </a:solidFill>
-                      <a:prstDash val="solid"/>
-                      <a:round/>
-                      <a:headEnd type="none" w="med" len="med"/>
-                      <a:tailEnd type="none" w="med" len="med"/>
-                    </a:lnR>
-                    <a:lnT w="9525" cap="flat" cmpd="sng" algn="ctr">
-                      <a:solidFill>
-                        <a:srgbClr val="E2E8F0"/>
-                      </a:solidFill>
-                      <a:prstDash val="solid"/>
-                      <a:round/>
-                      <a:headEnd type="none" w="med" len="med"/>
-                      <a:tailEnd type="none" w="med" len="med"/>
-                    </a:lnT>
-                    <a:lnB w="9525" cap="flat" cmpd="sng" algn="ctr">
-                      <a:solidFill>
-                        <a:srgbClr val="E2E8F0"/>
-                      </a:solidFill>
-                      <a:prstDash val="solid"/>
-                      <a:round/>
-                      <a:headEnd type="none" w="med" len="med"/>
-                      <a:tailEnd type="none" w="med" len="med"/>
-                    </a:lnB>
-                    <a:solidFill>
-                      <a:srgbClr val="FFFFFF"/>
-                    </a:solidFill>
-                  </a:tcPr>
-                </a:tc>
-                <a:tc>
-                  <a:txBody>
-                    <a:bodyPr/>
-                    <a:lstStyle/>
-                    <a:p>
-                      <a:pPr indent="0" marL="0">
-                        <a:buNone/>
-                      </a:pPr>
-                      <a:r>
-                        <a:rPr lang="en-US" sz="1300" dirty="0">
-                          <a:solidFill>
-                            <a:srgbClr val="1E293B"/>
-                          </a:solidFill>
-                          <a:latin typeface="Calibri" pitchFamily="34" charset="0"/>
-                          <a:ea typeface="Calibri" pitchFamily="34" charset="-122"/>
-                          <a:cs typeface="Calibri" pitchFamily="34" charset="-120"/>
-                        </a:rPr>
-                        <a:t>A22</a:t>
-                      </a:r>
-                      <a:endParaRPr lang="en-US" sz="1300" dirty="0">
-                        <a:latin typeface="Calibri" charset="0"/>
-                        <a:ea typeface="Calibri" charset="0"/>
-                        <a:cs typeface="Calibri" charset="0"/>
-                      </a:endParaRPr>
-                    </a:p>
-                  </a:txBody>
-                  <a:tcPr marL="91440" marR="91440" marT="45720" marB="45720" anchor="ctr">
-                    <a:lnL w="9525" cap="flat" cmpd="sng" algn="ctr">
-                      <a:solidFill>
-                        <a:srgbClr val="E2E8F0"/>
-                      </a:solidFill>
-                      <a:prstDash val="solid"/>
-                      <a:round/>
-                      <a:headEnd type="none" w="med" len="med"/>
-                      <a:tailEnd type="none" w="med" len="med"/>
-                    </a:lnL>
-                    <a:lnR w="9525" cap="flat" cmpd="sng" algn="ctr">
-                      <a:solidFill>
-                        <a:srgbClr val="E2E8F0"/>
-                      </a:solidFill>
-                      <a:prstDash val="solid"/>
-                      <a:round/>
-                      <a:headEnd type="none" w="med" len="med"/>
-                      <a:tailEnd type="none" w="med" len="med"/>
-                    </a:lnR>
-                    <a:lnT w="9525" cap="flat" cmpd="sng" algn="ctr">
-                      <a:solidFill>
-                        <a:srgbClr val="E2E8F0"/>
-                      </a:solidFill>
-                      <a:prstDash val="solid"/>
-                      <a:round/>
-                      <a:headEnd type="none" w="med" len="med"/>
-                      <a:tailEnd type="none" w="med" len="med"/>
-                    </a:lnT>
-                    <a:lnB w="9525" cap="flat" cmpd="sng" algn="ctr">
-                      <a:solidFill>
-                        <a:srgbClr val="E2E8F0"/>
-                      </a:solidFill>
-                      <a:prstDash val="solid"/>
-                      <a:round/>
-                      <a:headEnd type="none" w="med" len="med"/>
-                      <a:tailEnd type="none" w="med" len="med"/>
-                    </a:lnB>
-                    <a:solidFill>
-                      <a:srgbClr val="FFFFFF"/>
-                    </a:solidFill>
-                  </a:tcPr>
-                </a:tc>
-              </a:tr>
             </a:tbl>
           </a:graphicData>
         </a:graphic>
@@ -12052,10 +12891,6 @@
             </a:outerShdw>
           </a:effectLst>
         </p:spPr>
-        <p:txBody>
-          <a:bodyPr/>
-          <a:p/>
-        </p:txBody>
       </p:sp>
       <p:sp>
         <p:nvSpPr>
@@ -12081,10 +12916,6 @@
             <a:prstDash val="solid"/>
           </a:ln>
         </p:spPr>
-        <p:txBody>
-          <a:bodyPr/>
-          <a:p/>
-        </p:txBody>
       </p:sp>
       <p:sp>
         <p:nvSpPr>
@@ -12263,10 +13094,6 @@
             </a:outerShdw>
           </a:effectLst>
         </p:spPr>
-        <p:txBody>
-          <a:bodyPr/>
-          <a:p/>
-        </p:txBody>
       </p:sp>
       <p:sp>
         <p:nvSpPr>
@@ -12292,10 +13119,6 @@
             <a:prstDash val="solid"/>
           </a:ln>
         </p:spPr>
-        <p:txBody>
-          <a:bodyPr/>
-          <a:p/>
-        </p:txBody>
       </p:sp>
       <p:sp>
         <p:nvSpPr>
@@ -12474,10 +13297,6 @@
             </a:outerShdw>
           </a:effectLst>
         </p:spPr>
-        <p:txBody>
-          <a:bodyPr/>
-          <a:p/>
-        </p:txBody>
       </p:sp>
       <p:sp>
         <p:nvSpPr>
@@ -12503,10 +13322,6 @@
             <a:prstDash val="solid"/>
           </a:ln>
         </p:spPr>
-        <p:txBody>
-          <a:bodyPr/>
-          <a:p/>
-        </p:txBody>
       </p:sp>
       <p:sp>
         <p:nvSpPr>
@@ -12685,10 +13500,6 @@
             </a:outerShdw>
           </a:effectLst>
         </p:spPr>
-        <p:txBody>
-          <a:bodyPr/>
-          <a:p/>
-        </p:txBody>
       </p:sp>
       <p:sp>
         <p:nvSpPr>
@@ -12714,10 +13525,6 @@
             <a:prstDash val="solid"/>
           </a:ln>
         </p:spPr>
-        <p:txBody>
-          <a:bodyPr/>
-          <a:p/>
-        </p:txBody>
       </p:sp>
       <p:sp>
         <p:nvSpPr>
@@ -12896,10 +13703,6 @@
             </a:outerShdw>
           </a:effectLst>
         </p:spPr>
-        <p:txBody>
-          <a:bodyPr/>
-          <a:p/>
-        </p:txBody>
       </p:sp>
       <p:sp>
         <p:nvSpPr>
@@ -13080,14 +13883,10 @@
             <a:prstDash val="solid"/>
           </a:ln>
         </p:spPr>
-        <p:txBody>
-          <a:bodyPr/>
-          <a:p/>
-        </p:txBody>
       </p:sp>
       <p:pic>
         <p:nvPicPr>
-          <p:cNvPr id="4" name="Image 0" descr="C:\Users\Ari Azis\FinTechathon2026\kendali\docs\img\ui-redteam.jpg">    </p:cNvPr>
+          <p:cNvPr id="4" name="Image 0" descr="C:\Users\POGGY\Downloads\barengpoggy\FinTechathon2026\kendali\docs\img\ui-redteam.jpg">    </p:cNvPr>
           <p:cNvPicPr>
             <a:picLocks noChangeAspect="1"/>
           </p:cNvPicPr>
@@ -13308,10 +14107,6 @@
             </a:outerShdw>
           </a:effectLst>
         </p:spPr>
-        <p:txBody>
-          <a:bodyPr/>
-          <a:p/>
-        </p:txBody>
       </p:sp>
       <p:sp>
         <p:nvSpPr>
@@ -13465,7 +14260,7 @@
                   <a:schemeClr val="tx1"/>
                 </a:solidFill>
               </a:rPr>
-              <a:t>Measured, not claimed: 42 of 42 scenarios pass</a:t>
+              <a:t>Measured, not claimed: 57 of 57 scenarios pass</a:t>
             </a:r>
             <a:endParaRPr lang="en-US" sz="3400" dirty="0"/>
           </a:p>
@@ -13504,10 +14299,6 @@
             </a:outerShdw>
           </a:effectLst>
         </p:spPr>
-        <p:txBody>
-          <a:bodyPr/>
-          <a:p/>
-        </p:txBody>
       </p:sp>
       <p:sp>
         <p:nvSpPr>
@@ -13611,7 +14402,7 @@
                   <a:srgbClr val="475569"/>
                 </a:solidFill>
               </a:rPr>
-              <a:t>19 of 19 legitimate tasks done end-to-end</a:t>
+              <a:t>22 of 22 legitimate tasks done end-to-end</a:t>
             </a:r>
             <a:endParaRPr lang="en-US" sz="1300" dirty="0"/>
           </a:p>
@@ -13650,10 +14441,6 @@
             </a:outerShdw>
           </a:effectLst>
         </p:spPr>
-        <p:txBody>
-          <a:bodyPr/>
-          <a:p/>
-        </p:txBody>
       </p:sp>
       <p:sp>
         <p:nvSpPr>
@@ -13757,7 +14544,7 @@
                   <a:srgbClr val="475569"/>
                 </a:solidFill>
               </a:rPr>
-              <a:t>23 of 23 attacks stopped or safely routed</a:t>
+              <a:t>35 of 35 attacks stopped or safely routed</a:t>
             </a:r>
             <a:endParaRPr lang="en-US" sz="1300" dirty="0"/>
           </a:p>
@@ -13796,10 +14583,6 @@
             </a:outerShdw>
           </a:effectLst>
         </p:spPr>
-        <p:txBody>
-          <a:bodyPr/>
-          <a:p/>
-        </p:txBody>
       </p:sp>
       <p:sp>
         <p:nvSpPr>
@@ -13958,10 +14741,6 @@
             </a:outerShdw>
           </a:effectLst>
         </p:spPr>
-        <p:txBody>
-          <a:bodyPr/>
-          <a:p/>
-        </p:txBody>
       </p:sp>
       <p:sp>
         <p:nvSpPr>
@@ -14033,7 +14812,7 @@
                   <a:srgbClr val="334155"/>
                 </a:solidFill>
               </a:rPr>
-              <a:t>Each scenario runs on a fresh EVM snapshot: 91 real transactions in about 20 seconds, no API key needed. Public-testnet hashes in reports/TESTNET_EVIDENCE.md.</a:t>
+              <a:t>Each scenario runs on a fresh EVM snapshot: 113 real transactions in about 25 seconds, no API key needed. Public-testnet hashes in reports/TESTNET_EVIDENCE.md.</a:t>
             </a:r>
             <a:endParaRPr lang="en-US" sz="1600" dirty="0"/>
           </a:p>
